--- a/SlateBlue_Information_Visualization_Poster.pptx
+++ b/SlateBlue_Information_Visualization_Poster.pptx
@@ -1,26 +1,121 @@
 
 <file path=ppt/presentation.xml><?xml version="1.0" encoding="utf-8"?>
-<p:presentation xmlns:p="http://schemas.openxmlformats.org/presentationml/2006/main">
+<p:presentation xmlns:a="http://schemas.openxmlformats.org/drawingml/2006/main" xmlns:r="http://schemas.openxmlformats.org/officeDocument/2006/relationships" xmlns:p="http://schemas.openxmlformats.org/presentationml/2006/main">
   <p:sldMasterIdLst>
-    <p:sldMasterId xmlns:r="http://schemas.openxmlformats.org/officeDocument/2006/relationships" id="2147483648" r:id="R6a7312ab111e459b"/>
+    <p:sldMasterId id="2147483648" r:id="rId1"/>
   </p:sldMasterIdLst>
   <p:notesMasterIdLst>
-    <p:notesMasterId xmlns:r="http://schemas.openxmlformats.org/officeDocument/2006/relationships" r:id="Re4431aa7244846f2"/>
+    <p:notesMasterId r:id="rId3"/>
   </p:notesMasterIdLst>
   <p:sldIdLst>
-    <p:sldId xmlns:r="http://schemas.openxmlformats.org/officeDocument/2006/relationships" id="256" r:id="R2b4f7f1a5f924c7e"/>
+    <p:sldId id="256" r:id="rId2"/>
   </p:sldIdLst>
   <p:sldSz cx="15240000" cy="8572500"/>
   <p:notesSz cx="6858000" cy="9144000"/>
+  <p:defaultTextStyle>
+    <a:defPPr>
+      <a:defRPr lang="en-US"/>
+    </a:defPPr>
+    <a:lvl1pPr marL="0" algn="l" defTabSz="914400" rtl="0" eaLnBrk="1" latinLnBrk="0" hangingPunct="1">
+      <a:defRPr sz="1800" kern="1200">
+        <a:solidFill>
+          <a:schemeClr val="tx1"/>
+        </a:solidFill>
+        <a:latin typeface="+mn-lt"/>
+        <a:ea typeface="+mn-ea"/>
+        <a:cs typeface="+mn-cs"/>
+      </a:defRPr>
+    </a:lvl1pPr>
+    <a:lvl2pPr marL="457200" algn="l" defTabSz="914400" rtl="0" eaLnBrk="1" latinLnBrk="0" hangingPunct="1">
+      <a:defRPr sz="1800" kern="1200">
+        <a:solidFill>
+          <a:schemeClr val="tx1"/>
+        </a:solidFill>
+        <a:latin typeface="+mn-lt"/>
+        <a:ea typeface="+mn-ea"/>
+        <a:cs typeface="+mn-cs"/>
+      </a:defRPr>
+    </a:lvl2pPr>
+    <a:lvl3pPr marL="914400" algn="l" defTabSz="914400" rtl="0" eaLnBrk="1" latinLnBrk="0" hangingPunct="1">
+      <a:defRPr sz="1800" kern="1200">
+        <a:solidFill>
+          <a:schemeClr val="tx1"/>
+        </a:solidFill>
+        <a:latin typeface="+mn-lt"/>
+        <a:ea typeface="+mn-ea"/>
+        <a:cs typeface="+mn-cs"/>
+      </a:defRPr>
+    </a:lvl3pPr>
+    <a:lvl4pPr marL="1371600" algn="l" defTabSz="914400" rtl="0" eaLnBrk="1" latinLnBrk="0" hangingPunct="1">
+      <a:defRPr sz="1800" kern="1200">
+        <a:solidFill>
+          <a:schemeClr val="tx1"/>
+        </a:solidFill>
+        <a:latin typeface="+mn-lt"/>
+        <a:ea typeface="+mn-ea"/>
+        <a:cs typeface="+mn-cs"/>
+      </a:defRPr>
+    </a:lvl4pPr>
+    <a:lvl5pPr marL="1828800" algn="l" defTabSz="914400" rtl="0" eaLnBrk="1" latinLnBrk="0" hangingPunct="1">
+      <a:defRPr sz="1800" kern="1200">
+        <a:solidFill>
+          <a:schemeClr val="tx1"/>
+        </a:solidFill>
+        <a:latin typeface="+mn-lt"/>
+        <a:ea typeface="+mn-ea"/>
+        <a:cs typeface="+mn-cs"/>
+      </a:defRPr>
+    </a:lvl5pPr>
+    <a:lvl6pPr marL="2286000" algn="l" defTabSz="914400" rtl="0" eaLnBrk="1" latinLnBrk="0" hangingPunct="1">
+      <a:defRPr sz="1800" kern="1200">
+        <a:solidFill>
+          <a:schemeClr val="tx1"/>
+        </a:solidFill>
+        <a:latin typeface="+mn-lt"/>
+        <a:ea typeface="+mn-ea"/>
+        <a:cs typeface="+mn-cs"/>
+      </a:defRPr>
+    </a:lvl6pPr>
+    <a:lvl7pPr marL="2743200" algn="l" defTabSz="914400" rtl="0" eaLnBrk="1" latinLnBrk="0" hangingPunct="1">
+      <a:defRPr sz="1800" kern="1200">
+        <a:solidFill>
+          <a:schemeClr val="tx1"/>
+        </a:solidFill>
+        <a:latin typeface="+mn-lt"/>
+        <a:ea typeface="+mn-ea"/>
+        <a:cs typeface="+mn-cs"/>
+      </a:defRPr>
+    </a:lvl7pPr>
+    <a:lvl8pPr marL="3200400" algn="l" defTabSz="914400" rtl="0" eaLnBrk="1" latinLnBrk="0" hangingPunct="1">
+      <a:defRPr sz="1800" kern="1200">
+        <a:solidFill>
+          <a:schemeClr val="tx1"/>
+        </a:solidFill>
+        <a:latin typeface="+mn-lt"/>
+        <a:ea typeface="+mn-ea"/>
+        <a:cs typeface="+mn-cs"/>
+      </a:defRPr>
+    </a:lvl8pPr>
+    <a:lvl9pPr marL="3657600" algn="l" defTabSz="914400" rtl="0" eaLnBrk="1" latinLnBrk="0" hangingPunct="1">
+      <a:defRPr sz="1800" kern="1200">
+        <a:solidFill>
+          <a:schemeClr val="tx1"/>
+        </a:solidFill>
+        <a:latin typeface="+mn-lt"/>
+        <a:ea typeface="+mn-ea"/>
+        <a:cs typeface="+mn-cs"/>
+      </a:defRPr>
+    </a:lvl9pPr>
+  </p:defaultTextStyle>
 </p:presentation>
 </file>
 
 <file path=ppt/notesMasters/notesMaster1.xml><?xml version="1.0" encoding="utf-8"?>
-<p:notesMaster xmlns:p="http://schemas.openxmlformats.org/presentationml/2006/main">
+<p:notesMaster xmlns:a="http://schemas.openxmlformats.org/drawingml/2006/main" xmlns:r="http://schemas.openxmlformats.org/officeDocument/2006/relationships" xmlns:p="http://schemas.openxmlformats.org/presentationml/2006/main">
   <p:cSld>
     <p:bg>
       <p:bgRef idx="1001">
-        <a:schemeClr xmlns:a="http://schemas.openxmlformats.org/drawingml/2006/main" val="bg1"/>
+        <a:schemeClr val="bg1"/>
       </p:bgRef>
     </p:bg>
     <p:spTree>
@@ -30,380 +125,164 @@
         <p:nvPr/>
       </p:nvGrpSpPr>
       <p:grpSpPr>
-        <a:xfrm xmlns:a="http://schemas.openxmlformats.org/drawingml/2006/main"/>
+        <a:xfrm>
+          <a:off x="0" y="0"/>
+          <a:ext cx="0" cy="0"/>
+          <a:chOff x="0" y="0"/>
+          <a:chExt cx="0" cy="0"/>
+        </a:xfrm>
       </p:grpSpPr>
       <p:sp>
         <p:nvSpPr>
           <p:cNvPr id="2" name="Header Placeholder"/>
-          <p:cNvSpPr/>
+          <p:cNvSpPr>
+            <a:spLocks noGrp="1"/>
+          </p:cNvSpPr>
           <p:nvPr>
             <p:ph type="hdr" sz="quarter"/>
           </p:nvPr>
         </p:nvSpPr>
         <p:spPr>
-          <a:prstGeom xmlns:a="http://schemas.openxmlformats.org/drawingml/2006/main" prst="rect">
-            <a:avLst/>
-          </a:prstGeom>
-        </p:spPr>
-        <p:txBody>
-          <a:bodyPr xmlns:a="http://schemas.openxmlformats.org/drawingml/2006/main"/>
-          <a:lstStyle xmlns:a="http://schemas.openxmlformats.org/drawingml/2006/main"/>
-          <a:p xmlns:a="http://schemas.openxmlformats.org/drawingml/2006/main"/>
+          <a:prstGeom prst="rect">
+            <a:avLst/>
+          </a:prstGeom>
+        </p:spPr>
+        <p:txBody>
+          <a:bodyPr/>
+          <a:lstStyle/>
+          <a:p>
+            <a:endParaRPr/>
+          </a:p>
         </p:txBody>
       </p:sp>
       <p:sp>
         <p:nvSpPr>
           <p:cNvPr id="3" name="Date Placeholder"/>
-          <p:cNvSpPr/>
+          <p:cNvSpPr>
+            <a:spLocks noGrp="1"/>
+          </p:cNvSpPr>
           <p:nvPr>
             <p:ph type="dt" sz="quarter" idx="1"/>
           </p:nvPr>
         </p:nvSpPr>
         <p:spPr>
-          <a:prstGeom xmlns:a="http://schemas.openxmlformats.org/drawingml/2006/main" prst="rect">
-            <a:avLst/>
-          </a:prstGeom>
-        </p:spPr>
-        <p:txBody>
-          <a:bodyPr xmlns:a="http://schemas.openxmlformats.org/drawingml/2006/main"/>
-          <a:lstStyle xmlns:a="http://schemas.openxmlformats.org/drawingml/2006/main"/>
-          <a:p xmlns:a="http://schemas.openxmlformats.org/drawingml/2006/main"/>
+          <a:prstGeom prst="rect">
+            <a:avLst/>
+          </a:prstGeom>
+        </p:spPr>
+        <p:txBody>
+          <a:bodyPr/>
+          <a:lstStyle/>
+          <a:p>
+            <a:endParaRPr/>
+          </a:p>
         </p:txBody>
       </p:sp>
       <p:sp>
         <p:nvSpPr>
           <p:cNvPr id="4" name="Slide Image Placeholder"/>
-          <p:cNvSpPr/>
+          <p:cNvSpPr>
+            <a:spLocks noGrp="1" noRot="1" noChangeAspect="1"/>
+          </p:cNvSpPr>
           <p:nvPr>
             <p:ph type="sldImg" idx="2"/>
           </p:nvPr>
         </p:nvSpPr>
         <p:spPr>
-          <a:prstGeom xmlns:a="http://schemas.openxmlformats.org/drawingml/2006/main" prst="rect">
-            <a:avLst/>
-          </a:prstGeom>
-        </p:spPr>
-        <p:txBody>
-          <a:bodyPr xmlns:a="http://schemas.openxmlformats.org/drawingml/2006/main"/>
-          <a:lstStyle xmlns:a="http://schemas.openxmlformats.org/drawingml/2006/main"/>
-          <a:p xmlns:a="http://schemas.openxmlformats.org/drawingml/2006/main"/>
+          <a:prstGeom prst="rect">
+            <a:avLst/>
+          </a:prstGeom>
+        </p:spPr>
+        <p:txBody>
+          <a:bodyPr/>
+          <a:lstStyle/>
+          <a:p>
+            <a:endParaRPr/>
+          </a:p>
         </p:txBody>
       </p:sp>
       <p:sp>
         <p:nvSpPr>
           <p:cNvPr id="5" name="Notes Placeholder"/>
-          <p:cNvSpPr/>
+          <p:cNvSpPr>
+            <a:spLocks noGrp="1"/>
+          </p:cNvSpPr>
           <p:nvPr>
             <p:ph type="body" sz="quarter" idx="3"/>
           </p:nvPr>
         </p:nvSpPr>
         <p:spPr>
-          <a:prstGeom xmlns:a="http://schemas.openxmlformats.org/drawingml/2006/main" prst="rect">
-            <a:avLst/>
-          </a:prstGeom>
-        </p:spPr>
-        <p:txBody>
-          <a:bodyPr xmlns:a="http://schemas.openxmlformats.org/drawingml/2006/main"/>
-          <a:lstStyle xmlns:a="http://schemas.openxmlformats.org/drawingml/2006/main"/>
-          <a:p xmlns:a="http://schemas.openxmlformats.org/drawingml/2006/main"/>
+          <a:prstGeom prst="rect">
+            <a:avLst/>
+          </a:prstGeom>
+        </p:spPr>
+        <p:txBody>
+          <a:bodyPr/>
+          <a:lstStyle/>
+          <a:p>
+            <a:endParaRPr/>
+          </a:p>
         </p:txBody>
       </p:sp>
       <p:sp>
         <p:nvSpPr>
           <p:cNvPr id="6" name="Footer Placeholder"/>
-          <p:cNvSpPr/>
+          <p:cNvSpPr>
+            <a:spLocks noGrp="1"/>
+          </p:cNvSpPr>
           <p:nvPr>
             <p:ph type="ftr" sz="quarter" idx="4"/>
           </p:nvPr>
         </p:nvSpPr>
         <p:spPr>
-          <a:prstGeom xmlns:a="http://schemas.openxmlformats.org/drawingml/2006/main" prst="rect">
-            <a:avLst/>
-          </a:prstGeom>
-        </p:spPr>
-        <p:txBody>
-          <a:bodyPr xmlns:a="http://schemas.openxmlformats.org/drawingml/2006/main"/>
-          <a:lstStyle xmlns:a="http://schemas.openxmlformats.org/drawingml/2006/main"/>
-          <a:p xmlns:a="http://schemas.openxmlformats.org/drawingml/2006/main"/>
+          <a:prstGeom prst="rect">
+            <a:avLst/>
+          </a:prstGeom>
+        </p:spPr>
+        <p:txBody>
+          <a:bodyPr/>
+          <a:lstStyle/>
+          <a:p>
+            <a:endParaRPr/>
+          </a:p>
         </p:txBody>
       </p:sp>
       <p:sp>
         <p:nvSpPr>
           <p:cNvPr id="7" name="Slide Number Placeholder"/>
-          <p:cNvSpPr/>
+          <p:cNvSpPr>
+            <a:spLocks noGrp="1"/>
+          </p:cNvSpPr>
           <p:nvPr>
             <p:ph type="sldNum" sz="quarter" idx="5"/>
           </p:nvPr>
         </p:nvSpPr>
         <p:spPr>
-          <a:prstGeom xmlns:a="http://schemas.openxmlformats.org/drawingml/2006/main" prst="rect">
-            <a:avLst/>
-          </a:prstGeom>
-        </p:spPr>
-        <p:txBody>
-          <a:bodyPr xmlns:a="http://schemas.openxmlformats.org/drawingml/2006/main"/>
-          <a:lstStyle xmlns:a="http://schemas.openxmlformats.org/drawingml/2006/main"/>
-          <a:p xmlns:a="http://schemas.openxmlformats.org/drawingml/2006/main"/>
+          <a:prstGeom prst="rect">
+            <a:avLst/>
+          </a:prstGeom>
+        </p:spPr>
+        <p:txBody>
+          <a:bodyPr/>
+          <a:lstStyle/>
+          <a:p>
+            <a:endParaRPr/>
+          </a:p>
         </p:txBody>
       </p:sp>
     </p:spTree>
   </p:cSld>
   <p:clrMap bg1="lt1" tx1="dk1" bg2="lt2" tx2="dk2" accent1="accent1" accent2="accent2" accent3="accent3" accent4="accent4" accent5="accent5" accent6="accent6" hlink="hlink" folHlink="folHlink"/>
   <p:notesStyle>
-    <a:lvl1pPr xmlns:a="http://schemas.openxmlformats.org/drawingml/2006/main" marL="0" algn="l" defTabSz="914400" rtl="0" eaLnBrk="1" latinLnBrk="0" hangingPunct="1">
+    <a:lvl1pPr marL="0" algn="l" defTabSz="914400" rtl="0" eaLnBrk="1" latinLnBrk="0" hangingPunct="1">
       <a:defRPr sz="1200" kern="1200"/>
     </a:lvl1pPr>
   </p:notesStyle>
 </p:notesMaster>
 </file>
 
-<file path=ppt/notesMasters/theme/theme3.xml><?xml version="1.0" encoding="utf-8"?>
-<a:theme xmlns:a="http://schemas.openxmlformats.org/drawingml/2006/main" name="ChatGPT">
-  <a:themeElements>
-    <a:clrScheme name="ChatGPT">
-      <a:dk1>
-        <a:srgbClr val="000000"/>
-      </a:dk1>
-      <a:lt1>
-        <a:srgbClr val="FFFFFF"/>
-      </a:lt1>
-      <a:dk2>
-        <a:srgbClr val="0E2841"/>
-      </a:dk2>
-      <a:lt2>
-        <a:srgbClr val="E8E8E8"/>
-      </a:lt2>
-      <a:accent1>
-        <a:srgbClr val="156082"/>
-      </a:accent1>
-      <a:accent2>
-        <a:srgbClr val="E97132"/>
-      </a:accent2>
-      <a:accent3>
-        <a:srgbClr val="196B24"/>
-      </a:accent3>
-      <a:accent4>
-        <a:srgbClr val="0F9ED5"/>
-      </a:accent4>
-      <a:accent5>
-        <a:srgbClr val="A02B93"/>
-      </a:accent5>
-      <a:accent6>
-        <a:srgbClr val="4EA72E"/>
-      </a:accent6>
-      <a:hlink>
-        <a:srgbClr val="467886"/>
-      </a:hlink>
-      <a:folHlink>
-        <a:srgbClr val="96607D"/>
-      </a:folHlink>
-    </a:clrScheme>
-    <a:fontScheme name="Office">
-      <a:majorFont>
-        <a:latin typeface="Calibri Light"/>
-        <a:ea typeface="Calibri Light"/>
-        <a:cs typeface="Calibri Light"/>
-      </a:majorFont>
-      <a:minorFont>
-        <a:latin typeface="Calibri"/>
-        <a:ea typeface="Calibri"/>
-        <a:cs typeface="Calibri"/>
-      </a:minorFont>
-    </a:fontScheme>
-    <a:fmtScheme name="ChatGPT">
-      <a:fillStyleLst>
-        <a:solidFill>
-          <a:schemeClr val="phClr"/>
-        </a:solidFill>
-        <a:gradFill>
-          <a:gsLst>
-            <a:gs pos="0">
-              <a:schemeClr val="phClr">
-                <a:tint val="67000"/>
-                <a:lumMod val="110000"/>
-                <a:satMod val="105000"/>
-              </a:schemeClr>
-            </a:gs>
-            <a:gs pos="50000">
-              <a:schemeClr val="phClr">
-                <a:tint val="73000"/>
-                <a:lumMod val="105000"/>
-                <a:satMod val="103000"/>
-              </a:schemeClr>
-            </a:gs>
-            <a:gs pos="100000">
-              <a:schemeClr val="phClr">
-                <a:tint val="81000"/>
-                <a:lumMod val="105000"/>
-                <a:satMod val="109000"/>
-              </a:schemeClr>
-            </a:gs>
-          </a:gsLst>
-          <a:lin ang="5400000" scaled="0"/>
-        </a:gradFill>
-        <a:gradFill>
-          <a:gsLst>
-            <a:gs pos="0">
-              <a:schemeClr val="phClr">
-                <a:tint val="94000"/>
-                <a:lumMod val="102000"/>
-                <a:satMod val="103000"/>
-              </a:schemeClr>
-            </a:gs>
-            <a:gs pos="50000">
-              <a:schemeClr val="phClr">
-                <a:shade val="100000"/>
-                <a:lumMod val="100000"/>
-                <a:satMod val="110000"/>
-              </a:schemeClr>
-            </a:gs>
-            <a:gs pos="100000">
-              <a:schemeClr val="phClr">
-                <a:shade val="78000"/>
-                <a:lumMod val="99000"/>
-                <a:satMod val="120000"/>
-              </a:schemeClr>
-            </a:gs>
-          </a:gsLst>
-          <a:lin ang="5400000" scaled="0"/>
-        </a:gradFill>
-      </a:fillStyleLst>
-      <a:lnStyleLst>
-        <a:ln w="12700">
-          <a:solidFill>
-            <a:schemeClr val="phClr"/>
-          </a:solidFill>
-          <a:prstDash val="solid"/>
-        </a:ln>
-        <a:ln w="19050">
-          <a:solidFill>
-            <a:schemeClr val="phClr"/>
-          </a:solidFill>
-          <a:prstDash val="solid"/>
-        </a:ln>
-        <a:ln w="25400">
-          <a:solidFill>
-            <a:schemeClr val="phClr"/>
-          </a:solidFill>
-          <a:prstDash val="solid"/>
-        </a:ln>
-      </a:lnStyleLst>
-      <a:effectStyleLst>
-        <a:effectStyle>
-          <a:effectLst/>
-        </a:effectStyle>
-        <a:effectStyle>
-          <a:effectLst/>
-        </a:effectStyle>
-        <a:effectStyle>
-          <a:effectLst>
-            <a:outerShdw blurRad="57150" dist="19050" dir="5400000">
-              <a:srgbClr val="000000">
-                <a:alpha val="16000"/>
-              </a:srgbClr>
-            </a:outerShdw>
-          </a:effectLst>
-        </a:effectStyle>
-        <a:effectStyle>
-          <a:effectLst>
-            <a:outerShdw blurRad="19050" dist="9525" dir="5400000">
-              <a:srgbClr val="000000">
-                <a:alpha val="6000"/>
-              </a:srgbClr>
-            </a:outerShdw>
-          </a:effectLst>
-        </a:effectStyle>
-        <a:effectStyle>
-          <a:effectLst>
-            <a:outerShdw blurRad="28575" dist="9525" dir="5400000">
-              <a:srgbClr val="000000">
-                <a:alpha val="8000"/>
-              </a:srgbClr>
-            </a:outerShdw>
-          </a:effectLst>
-        </a:effectStyle>
-        <a:effectStyle>
-          <a:effectLst>
-            <a:outerShdw blurRad="57150" dist="19050" dir="5400000">
-              <a:srgbClr val="000000">
-                <a:alpha val="10000"/>
-              </a:srgbClr>
-            </a:outerShdw>
-          </a:effectLst>
-        </a:effectStyle>
-        <a:effectStyle>
-          <a:effectLst>
-            <a:outerShdw blurRad="114300" dist="38100" dir="5400000">
-              <a:srgbClr val="000000">
-                <a:alpha val="12000"/>
-              </a:srgbClr>
-            </a:outerShdw>
-          </a:effectLst>
-        </a:effectStyle>
-        <a:effectStyle>
-          <a:effectLst>
-            <a:outerShdw blurRad="171450" dist="57150" dir="5400000">
-              <a:srgbClr val="000000">
-                <a:alpha val="16000"/>
-              </a:srgbClr>
-            </a:outerShdw>
-          </a:effectLst>
-        </a:effectStyle>
-        <a:effectStyle>
-          <a:effectLst>
-            <a:outerShdw blurRad="266700" dist="95250" dir="5400000">
-              <a:srgbClr val="000000">
-                <a:alpha val="24000"/>
-              </a:srgbClr>
-            </a:outerShdw>
-          </a:effectLst>
-        </a:effectStyle>
-      </a:effectStyleLst>
-      <a:bgFillStyleLst>
-        <a:solidFill>
-          <a:schemeClr val="phClr"/>
-        </a:solidFill>
-        <a:solidFill>
-          <a:schemeClr val="phClr">
-            <a:tint val="95000"/>
-            <a:satMod val="170000"/>
-          </a:schemeClr>
-        </a:solidFill>
-        <a:gradFill>
-          <a:gsLst>
-            <a:gs pos="0">
-              <a:schemeClr val="phClr">
-                <a:tint val="93000"/>
-                <a:shade val="98000"/>
-                <a:lumMod val="102000"/>
-                <a:satMod val="150000"/>
-              </a:schemeClr>
-            </a:gs>
-            <a:gs pos="50000">
-              <a:schemeClr val="phClr">
-                <a:tint val="98000"/>
-                <a:shade val="90000"/>
-                <a:lumMod val="103000"/>
-                <a:satMod val="130000"/>
-              </a:schemeClr>
-            </a:gs>
-            <a:gs pos="100000">
-              <a:schemeClr val="phClr">
-                <a:shade val="63000"/>
-                <a:satMod val="120000"/>
-              </a:schemeClr>
-            </a:gs>
-          </a:gsLst>
-          <a:lin ang="5400000" scaled="0"/>
-        </a:gradFill>
-      </a:bgFillStyleLst>
-    </a:fmtScheme>
-  </a:themeElements>
-</a:theme>
-</file>
-
 <file path=ppt/notesSlides/notesSlide1.xml><?xml version="1.0" encoding="utf-8"?>
-<p:notes xmlns:p="http://schemas.openxmlformats.org/presentationml/2006/main">
+<p:notes xmlns:a="http://schemas.openxmlformats.org/drawingml/2006/main" xmlns:r="http://schemas.openxmlformats.org/officeDocument/2006/relationships" xmlns:p="http://schemas.openxmlformats.org/presentationml/2006/main">
   <p:cSld>
     <p:spTree>
       <p:nvGrpSpPr>
@@ -412,16 +291,21 @@
         <p:nvPr/>
       </p:nvGrpSpPr>
       <p:grpSpPr>
-        <a:xfrm xmlns:a="http://schemas.openxmlformats.org/drawingml/2006/main"/>
+        <a:xfrm>
+          <a:off x="0" y="0"/>
+          <a:ext cx="0" cy="0"/>
+          <a:chOff x="0" y="0"/>
+          <a:chExt cx="0" cy="0"/>
+        </a:xfrm>
       </p:grpSpPr>
       <p:sp>
         <p:nvSpPr>
           <p:cNvPr id="2" name="Slide Image Placeholder 1"/>
           <p:cNvSpPr>
-            <a:spLocks xmlns:a="http://schemas.openxmlformats.org/drawingml/2006/main" noGrp="1"/>
+            <a:spLocks noGrp="1" noRot="1" noChangeAspect="1"/>
           </p:cNvSpPr>
           <p:nvPr>
-            <p:ph type="sldImg" idx="0"/>
+            <p:ph type="sldImg"/>
           </p:nvPr>
         </p:nvSpPr>
         <p:spPr/>
@@ -430,7 +314,7 @@
         <p:nvSpPr>
           <p:cNvPr id="3" name="Notes Placeholder 2"/>
           <p:cNvSpPr>
-            <a:spLocks xmlns:a="http://schemas.openxmlformats.org/drawingml/2006/main" noGrp="1"/>
+            <a:spLocks noGrp="1"/>
           </p:cNvSpPr>
           <p:nvPr>
             <p:ph type="body" idx="1"/>
@@ -438,39 +322,39 @@
         </p:nvSpPr>
         <p:spPr/>
         <p:txBody>
-          <a:bodyPr xmlns:a="http://schemas.openxmlformats.org/drawingml/2006/main"/>
-          <a:lstStyle xmlns:a="http://schemas.openxmlformats.org/drawingml/2006/main"/>
-          <a:p xmlns:a="http://schemas.openxmlformats.org/drawingml/2006/main">
+          <a:bodyPr/>
+          <a:lstStyle/>
+          <a:p>
             <a:r>
               <a:t>[Sources]</a:t>
             </a:r>
           </a:p>
-          <a:p xmlns:a="http://schemas.openxmlformats.org/drawingml/2006/main">
+          <a:p>
             <a:r>
               <a:t>Original visualization and article: https://www.carbonbrief.org/analysis-global-co2-emissions-will-reach-new-high-in-2024-despite-slower-growth/</a:t>
             </a:r>
           </a:p>
-          <a:p xmlns:a="http://schemas.openxmlformats.org/drawingml/2006/main">
+          <a:p>
             <a:r>
               <a:t>Global Carbon Project, National Fossil Carbon Emissions 2024 v1.0: https://globalcarbonbudget.org/gcb-2024/</a:t>
             </a:r>
           </a:p>
-          <a:p xmlns:a="http://schemas.openxmlformats.org/drawingml/2006/main">
+          <a:p>
             <a:r>
               <a:t>World Bank population indicator SP.POP.TOTL: https://data.worldbank.org/indicator/SP.POP.TOTL</a:t>
             </a:r>
           </a:p>
-          <a:p xmlns:a="http://schemas.openxmlformats.org/drawingml/2006/main">
+          <a:p>
             <a:r>
               <a:t>World Bank GDP (current US$) indicator NY.GDP.MKTP.CD: https://data.worldbank.org/indicator/NY.GDP.MKTP.CD</a:t>
             </a:r>
           </a:p>
-          <a:p xmlns:a="http://schemas.openxmlformats.org/drawingml/2006/main">
+          <a:p>
             <a:r>
               <a:t>Improved visualization: user-provided project output generated from the cited datasets.</a:t>
             </a:r>
           </a:p>
-          <a:p xmlns:a="http://schemas.openxmlformats.org/drawingml/2006/main">
+          <a:p>
             <a:r>
               <a:t>[/Sources]</a:t>
             </a:r>
@@ -481,7 +365,7 @@
         <p:nvSpPr>
           <p:cNvPr id="4" name="Slide Number Placeholder 3"/>
           <p:cNvSpPr>
-            <a:spLocks xmlns:a="http://schemas.openxmlformats.org/drawingml/2006/main" noGrp="1"/>
+            <a:spLocks noGrp="1"/>
           </p:cNvSpPr>
           <p:nvPr>
             <p:ph type="sldNum" idx="5"/>
@@ -489,21 +373,23 @@
         </p:nvSpPr>
         <p:spPr/>
         <p:txBody>
-          <a:bodyPr xmlns:a="http://schemas.openxmlformats.org/drawingml/2006/main"/>
-          <a:lstStyle xmlns:a="http://schemas.openxmlformats.org/drawingml/2006/main"/>
-          <a:p xmlns:a="http://schemas.openxmlformats.org/drawingml/2006/main"/>
+          <a:bodyPr/>
+          <a:lstStyle/>
+          <a:p>
+            <a:endParaRPr/>
+          </a:p>
         </p:txBody>
       </p:sp>
     </p:spTree>
   </p:cSld>
   <p:clrMapOvr>
-    <a:masterClrMapping xmlns:a="http://schemas.openxmlformats.org/drawingml/2006/main"/>
+    <a:masterClrMapping/>
   </p:clrMapOvr>
 </p:notes>
 </file>
 
 <file path=ppt/slideLayouts/slideLayout1.xml><?xml version="1.0" encoding="utf-8"?>
-<p:sldLayout xmlns:p="http://schemas.openxmlformats.org/presentationml/2006/main" type="title">
+<p:sldLayout xmlns:a="http://schemas.openxmlformats.org/drawingml/2006/main" xmlns:r="http://schemas.openxmlformats.org/officeDocument/2006/relationships" xmlns:p="http://schemas.openxmlformats.org/presentationml/2006/main" type="title">
   <p:cSld name="Title Slide">
     <p:spTree>
       <p:nvGrpSpPr>
@@ -512,19 +398,27 @@
         <p:nvPr/>
       </p:nvGrpSpPr>
       <p:grpSpPr>
-        <a:xfrm xmlns:a="http://schemas.openxmlformats.org/drawingml/2006/main"/>
+        <a:xfrm>
+          <a:off x="0" y="0"/>
+          <a:ext cx="0" cy="0"/>
+          <a:chOff x="0" y="0"/>
+          <a:chExt cx="0" cy="0"/>
+        </a:xfrm>
       </p:grpSpPr>
     </p:spTree>
   </p:cSld>
+  <p:clrMapOvr>
+    <a:masterClrMapping/>
+  </p:clrMapOvr>
 </p:sldLayout>
 </file>
 
 <file path=ppt/slideMasters/slideMaster1.xml><?xml version="1.0" encoding="utf-8"?>
-<p:sldMaster xmlns:p="http://schemas.openxmlformats.org/presentationml/2006/main">
+<p:sldMaster xmlns:a="http://schemas.openxmlformats.org/drawingml/2006/main" xmlns:r="http://schemas.openxmlformats.org/officeDocument/2006/relationships" xmlns:p="http://schemas.openxmlformats.org/presentationml/2006/main">
   <p:cSld name="Master">
     <p:bg>
       <p:bgRef idx="1001">
-        <a:schemeClr xmlns:a="http://schemas.openxmlformats.org/drawingml/2006/main" val="bg1"/>
+        <a:schemeClr val="bg1"/>
       </p:bgRef>
     </p:bg>
     <p:spTree>
@@ -534,17 +428,22 @@
         <p:nvPr/>
       </p:nvGrpSpPr>
       <p:grpSpPr>
-        <a:xfrm xmlns:a="http://schemas.openxmlformats.org/drawingml/2006/main"/>
+        <a:xfrm>
+          <a:off x="0" y="0"/>
+          <a:ext cx="0" cy="0"/>
+          <a:chOff x="0" y="0"/>
+          <a:chExt cx="0" cy="0"/>
+        </a:xfrm>
       </p:grpSpPr>
     </p:spTree>
   </p:cSld>
   <p:clrMap bg1="lt1" tx1="dk1" bg2="lt2" tx2="dk2" accent1="accent1" accent2="accent2" accent3="accent3" accent4="accent4" accent5="accent5" accent6="accent6" hlink="hlink" folHlink="folHlink"/>
   <p:sldLayoutIdLst>
-    <p:sldLayoutId xmlns:r="http://schemas.openxmlformats.org/officeDocument/2006/relationships" id="2147483649" r:id="R4f0678ec7ade487d"/>
+    <p:sldLayoutId id="2147483649" r:id="rId1"/>
   </p:sldLayoutIdLst>
   <p:txStyles>
     <p:titleStyle>
-      <a:lvl1pPr xmlns:a="http://schemas.openxmlformats.org/drawingml/2006/main" algn="l">
+      <a:lvl1pPr algn="l">
         <a:lnSpc>
           <a:spcPct val="90000"/>
         </a:lnSpc>
@@ -563,7 +462,7 @@
       </a:lvl1pPr>
     </p:titleStyle>
     <p:bodyStyle>
-      <a:lvl1pPr xmlns:a="http://schemas.openxmlformats.org/drawingml/2006/main" marL="228600" indent="-228600" algn="l">
+      <a:lvl1pPr marL="228600" indent="-228600" algn="l">
         <a:lnSpc>
           <a:spcPct val="90000"/>
         </a:lnSpc>
@@ -580,7 +479,7 @@
           <a:cs typeface="+mn-lt"/>
         </a:defRPr>
       </a:lvl1pPr>
-      <a:lvl2pPr xmlns:a="http://schemas.openxmlformats.org/drawingml/2006/main" marL="685800" indent="-228600" algn="l">
+      <a:lvl2pPr marL="685800" indent="-228600" algn="l">
         <a:lnSpc>
           <a:spcPct val="90000"/>
         </a:lnSpc>
@@ -597,7 +496,7 @@
           <a:cs typeface="+mn-lt"/>
         </a:defRPr>
       </a:lvl2pPr>
-      <a:lvl3pPr xmlns:a="http://schemas.openxmlformats.org/drawingml/2006/main" marL="1143000" indent="-228600" algn="l">
+      <a:lvl3pPr marL="1143000" indent="-228600" algn="l">
         <a:lnSpc>
           <a:spcPct val="90000"/>
         </a:lnSpc>
@@ -614,7 +513,7 @@
           <a:cs typeface="+mn-lt"/>
         </a:defRPr>
       </a:lvl3pPr>
-      <a:lvl4pPr xmlns:a="http://schemas.openxmlformats.org/drawingml/2006/main" marL="1600200" indent="-228600" algn="l">
+      <a:lvl4pPr marL="1600200" indent="-228600" algn="l">
         <a:lnSpc>
           <a:spcPct val="90000"/>
         </a:lnSpc>
@@ -631,7 +530,7 @@
           <a:cs typeface="+mn-lt"/>
         </a:defRPr>
       </a:lvl4pPr>
-      <a:lvl5pPr xmlns:a="http://schemas.openxmlformats.org/drawingml/2006/main" marL="2057400" indent="-228600" algn="l">
+      <a:lvl5pPr marL="2057400" indent="-228600" algn="l">
         <a:lnSpc>
           <a:spcPct val="90000"/>
         </a:lnSpc>
@@ -648,7 +547,7 @@
           <a:cs typeface="+mn-lt"/>
         </a:defRPr>
       </a:lvl5pPr>
-      <a:lvl6pPr xmlns:a="http://schemas.openxmlformats.org/drawingml/2006/main" marL="2514600" indent="-228600" algn="l">
+      <a:lvl6pPr marL="2514600" indent="-228600" algn="l">
         <a:lnSpc>
           <a:spcPct val="90000"/>
         </a:lnSpc>
@@ -665,7 +564,7 @@
           <a:cs typeface="+mn-lt"/>
         </a:defRPr>
       </a:lvl6pPr>
-      <a:lvl7pPr xmlns:a="http://schemas.openxmlformats.org/drawingml/2006/main" marL="2971800" indent="-228600" algn="l">
+      <a:lvl7pPr marL="2971800" indent="-228600" algn="l">
         <a:lnSpc>
           <a:spcPct val="90000"/>
         </a:lnSpc>
@@ -682,7 +581,7 @@
           <a:cs typeface="+mn-lt"/>
         </a:defRPr>
       </a:lvl7pPr>
-      <a:lvl8pPr xmlns:a="http://schemas.openxmlformats.org/drawingml/2006/main" marL="3429000" indent="-228600" algn="l">
+      <a:lvl8pPr marL="3429000" indent="-228600" algn="l">
         <a:lnSpc>
           <a:spcPct val="90000"/>
         </a:lnSpc>
@@ -699,7 +598,7 @@
           <a:cs typeface="+mn-lt"/>
         </a:defRPr>
       </a:lvl8pPr>
-      <a:lvl9pPr xmlns:a="http://schemas.openxmlformats.org/drawingml/2006/main" marL="3886200" indent="-228600" algn="l">
+      <a:lvl9pPr marL="3886200" indent="-228600" algn="l">
         <a:lnSpc>
           <a:spcPct val="90000"/>
         </a:lnSpc>
@@ -718,7 +617,7 @@
       </a:lvl9pPr>
     </p:bodyStyle>
     <p:otherStyle>
-      <a:lvl1pPr xmlns:a="http://schemas.openxmlformats.org/drawingml/2006/main" marL="0" algn="l">
+      <a:lvl1pPr marL="0" algn="l">
         <a:buNone/>
         <a:defRPr sz="1800">
           <a:solidFill>
@@ -729,7 +628,7 @@
           <a:cs typeface="+mn-lt"/>
         </a:defRPr>
       </a:lvl1pPr>
-      <a:lvl2pPr xmlns:a="http://schemas.openxmlformats.org/drawingml/2006/main" marL="457200" algn="l">
+      <a:lvl2pPr marL="457200" algn="l">
         <a:buNone/>
         <a:defRPr sz="1800">
           <a:solidFill>
@@ -740,7 +639,7 @@
           <a:cs typeface="+mn-lt"/>
         </a:defRPr>
       </a:lvl2pPr>
-      <a:lvl3pPr xmlns:a="http://schemas.openxmlformats.org/drawingml/2006/main" marL="914400" algn="l">
+      <a:lvl3pPr marL="914400" algn="l">
         <a:buNone/>
         <a:defRPr sz="1800">
           <a:solidFill>
@@ -751,7 +650,7 @@
           <a:cs typeface="+mn-lt"/>
         </a:defRPr>
       </a:lvl3pPr>
-      <a:lvl4pPr xmlns:a="http://schemas.openxmlformats.org/drawingml/2006/main" marL="1371600" algn="l">
+      <a:lvl4pPr marL="1371600" algn="l">
         <a:buNone/>
         <a:defRPr sz="1800">
           <a:solidFill>
@@ -762,7 +661,7 @@
           <a:cs typeface="+mn-lt"/>
         </a:defRPr>
       </a:lvl4pPr>
-      <a:lvl5pPr xmlns:a="http://schemas.openxmlformats.org/drawingml/2006/main" marL="1828800" algn="l">
+      <a:lvl5pPr marL="1828800" algn="l">
         <a:buNone/>
         <a:defRPr sz="1800">
           <a:solidFill>
@@ -773,7 +672,7 @@
           <a:cs typeface="+mn-lt"/>
         </a:defRPr>
       </a:lvl5pPr>
-      <a:lvl6pPr xmlns:a="http://schemas.openxmlformats.org/drawingml/2006/main" marL="2286000" algn="l">
+      <a:lvl6pPr marL="2286000" algn="l">
         <a:buNone/>
         <a:defRPr sz="1800">
           <a:solidFill>
@@ -784,7 +683,7 @@
           <a:cs typeface="+mn-lt"/>
         </a:defRPr>
       </a:lvl6pPr>
-      <a:lvl7pPr xmlns:a="http://schemas.openxmlformats.org/drawingml/2006/main" marL="2743200" algn="l">
+      <a:lvl7pPr marL="2743200" algn="l">
         <a:buNone/>
         <a:defRPr sz="1800">
           <a:solidFill>
@@ -795,7 +694,7 @@
           <a:cs typeface="+mn-lt"/>
         </a:defRPr>
       </a:lvl7pPr>
-      <a:lvl8pPr xmlns:a="http://schemas.openxmlformats.org/drawingml/2006/main" marL="3200400" algn="l">
+      <a:lvl8pPr marL="3200400" algn="l">
         <a:buNone/>
         <a:defRPr sz="1800">
           <a:solidFill>
@@ -806,7 +705,7 @@
           <a:cs typeface="+mn-lt"/>
         </a:defRPr>
       </a:lvl8pPr>
-      <a:lvl9pPr xmlns:a="http://schemas.openxmlformats.org/drawingml/2006/main" marL="3657600" algn="l">
+      <a:lvl9pPr marL="3657600" algn="l">
         <a:buNone/>
         <a:defRPr sz="1800">
           <a:solidFill>
@@ -822,259 +721,15 @@
 </p:sldMaster>
 </file>
 
-<file path=ppt/slideMasters/theme/theme2.xml><?xml version="1.0" encoding="utf-8"?>
-<a:theme xmlns:a="http://schemas.openxmlformats.org/drawingml/2006/main" name="ChatGPT">
-  <a:themeElements>
-    <a:clrScheme name="ChatGPT">
-      <a:dk1>
-        <a:srgbClr val="000000"/>
-      </a:dk1>
-      <a:lt1>
-        <a:srgbClr val="FFFFFF"/>
-      </a:lt1>
-      <a:dk2>
-        <a:srgbClr val="0E2841"/>
-      </a:dk2>
-      <a:lt2>
-        <a:srgbClr val="E8E8E8"/>
-      </a:lt2>
-      <a:accent1>
-        <a:srgbClr val="156082"/>
-      </a:accent1>
-      <a:accent2>
-        <a:srgbClr val="E97132"/>
-      </a:accent2>
-      <a:accent3>
-        <a:srgbClr val="196B24"/>
-      </a:accent3>
-      <a:accent4>
-        <a:srgbClr val="0F9ED5"/>
-      </a:accent4>
-      <a:accent5>
-        <a:srgbClr val="A02B93"/>
-      </a:accent5>
-      <a:accent6>
-        <a:srgbClr val="4EA72E"/>
-      </a:accent6>
-      <a:hlink>
-        <a:srgbClr val="467886"/>
-      </a:hlink>
-      <a:folHlink>
-        <a:srgbClr val="96607D"/>
-      </a:folHlink>
-    </a:clrScheme>
-    <a:fontScheme name="Office">
-      <a:majorFont>
-        <a:latin typeface="Calibri Light"/>
-        <a:ea typeface="Calibri Light"/>
-        <a:cs typeface="Calibri Light"/>
-      </a:majorFont>
-      <a:minorFont>
-        <a:latin typeface="Calibri"/>
-        <a:ea typeface="Calibri"/>
-        <a:cs typeface="Calibri"/>
-      </a:minorFont>
-    </a:fontScheme>
-    <a:fmtScheme name="ChatGPT">
-      <a:fillStyleLst>
-        <a:solidFill>
-          <a:schemeClr val="phClr"/>
-        </a:solidFill>
-        <a:gradFill>
-          <a:gsLst>
-            <a:gs pos="0">
-              <a:schemeClr val="phClr">
-                <a:tint val="67000"/>
-                <a:lumMod val="110000"/>
-                <a:satMod val="105000"/>
-              </a:schemeClr>
-            </a:gs>
-            <a:gs pos="50000">
-              <a:schemeClr val="phClr">
-                <a:tint val="73000"/>
-                <a:lumMod val="105000"/>
-                <a:satMod val="103000"/>
-              </a:schemeClr>
-            </a:gs>
-            <a:gs pos="100000">
-              <a:schemeClr val="phClr">
-                <a:tint val="81000"/>
-                <a:lumMod val="105000"/>
-                <a:satMod val="109000"/>
-              </a:schemeClr>
-            </a:gs>
-          </a:gsLst>
-          <a:lin ang="5400000" scaled="0"/>
-        </a:gradFill>
-        <a:gradFill>
-          <a:gsLst>
-            <a:gs pos="0">
-              <a:schemeClr val="phClr">
-                <a:tint val="94000"/>
-                <a:lumMod val="102000"/>
-                <a:satMod val="103000"/>
-              </a:schemeClr>
-            </a:gs>
-            <a:gs pos="50000">
-              <a:schemeClr val="phClr">
-                <a:shade val="100000"/>
-                <a:lumMod val="100000"/>
-                <a:satMod val="110000"/>
-              </a:schemeClr>
-            </a:gs>
-            <a:gs pos="100000">
-              <a:schemeClr val="phClr">
-                <a:shade val="78000"/>
-                <a:lumMod val="99000"/>
-                <a:satMod val="120000"/>
-              </a:schemeClr>
-            </a:gs>
-          </a:gsLst>
-          <a:lin ang="5400000" scaled="0"/>
-        </a:gradFill>
-      </a:fillStyleLst>
-      <a:lnStyleLst>
-        <a:ln w="12700">
-          <a:solidFill>
-            <a:schemeClr val="phClr"/>
-          </a:solidFill>
-          <a:prstDash val="solid"/>
-        </a:ln>
-        <a:ln w="19050">
-          <a:solidFill>
-            <a:schemeClr val="phClr"/>
-          </a:solidFill>
-          <a:prstDash val="solid"/>
-        </a:ln>
-        <a:ln w="25400">
-          <a:solidFill>
-            <a:schemeClr val="phClr"/>
-          </a:solidFill>
-          <a:prstDash val="solid"/>
-        </a:ln>
-      </a:lnStyleLst>
-      <a:effectStyleLst>
-        <a:effectStyle>
-          <a:effectLst/>
-        </a:effectStyle>
-        <a:effectStyle>
-          <a:effectLst/>
-        </a:effectStyle>
-        <a:effectStyle>
-          <a:effectLst>
-            <a:outerShdw blurRad="57150" dist="19050" dir="5400000">
-              <a:srgbClr val="000000">
-                <a:alpha val="16000"/>
-              </a:srgbClr>
-            </a:outerShdw>
-          </a:effectLst>
-        </a:effectStyle>
-        <a:effectStyle>
-          <a:effectLst>
-            <a:outerShdw blurRad="19050" dist="9525" dir="5400000">
-              <a:srgbClr val="000000">
-                <a:alpha val="6000"/>
-              </a:srgbClr>
-            </a:outerShdw>
-          </a:effectLst>
-        </a:effectStyle>
-        <a:effectStyle>
-          <a:effectLst>
-            <a:outerShdw blurRad="28575" dist="9525" dir="5400000">
-              <a:srgbClr val="000000">
-                <a:alpha val="8000"/>
-              </a:srgbClr>
-            </a:outerShdw>
-          </a:effectLst>
-        </a:effectStyle>
-        <a:effectStyle>
-          <a:effectLst>
-            <a:outerShdw blurRad="57150" dist="19050" dir="5400000">
-              <a:srgbClr val="000000">
-                <a:alpha val="10000"/>
-              </a:srgbClr>
-            </a:outerShdw>
-          </a:effectLst>
-        </a:effectStyle>
-        <a:effectStyle>
-          <a:effectLst>
-            <a:outerShdw blurRad="114300" dist="38100" dir="5400000">
-              <a:srgbClr val="000000">
-                <a:alpha val="12000"/>
-              </a:srgbClr>
-            </a:outerShdw>
-          </a:effectLst>
-        </a:effectStyle>
-        <a:effectStyle>
-          <a:effectLst>
-            <a:outerShdw blurRad="171450" dist="57150" dir="5400000">
-              <a:srgbClr val="000000">
-                <a:alpha val="16000"/>
-              </a:srgbClr>
-            </a:outerShdw>
-          </a:effectLst>
-        </a:effectStyle>
-        <a:effectStyle>
-          <a:effectLst>
-            <a:outerShdw blurRad="266700" dist="95250" dir="5400000">
-              <a:srgbClr val="000000">
-                <a:alpha val="24000"/>
-              </a:srgbClr>
-            </a:outerShdw>
-          </a:effectLst>
-        </a:effectStyle>
-      </a:effectStyleLst>
-      <a:bgFillStyleLst>
-        <a:solidFill>
-          <a:schemeClr val="phClr"/>
-        </a:solidFill>
-        <a:solidFill>
-          <a:schemeClr val="phClr">
-            <a:tint val="95000"/>
-            <a:satMod val="170000"/>
-          </a:schemeClr>
-        </a:solidFill>
-        <a:gradFill>
-          <a:gsLst>
-            <a:gs pos="0">
-              <a:schemeClr val="phClr">
-                <a:tint val="93000"/>
-                <a:shade val="98000"/>
-                <a:lumMod val="102000"/>
-                <a:satMod val="150000"/>
-              </a:schemeClr>
-            </a:gs>
-            <a:gs pos="50000">
-              <a:schemeClr val="phClr">
-                <a:tint val="98000"/>
-                <a:shade val="90000"/>
-                <a:lumMod val="103000"/>
-                <a:satMod val="130000"/>
-              </a:schemeClr>
-            </a:gs>
-            <a:gs pos="100000">
-              <a:schemeClr val="phClr">
-                <a:shade val="63000"/>
-                <a:satMod val="120000"/>
-              </a:schemeClr>
-            </a:gs>
-          </a:gsLst>
-          <a:lin ang="5400000" scaled="0"/>
-        </a:gradFill>
-      </a:bgFillStyleLst>
-    </a:fmtScheme>
-  </a:themeElements>
-</a:theme>
-</file>
-
 <file path=ppt/slides/slide1.xml><?xml version="1.0" encoding="utf-8"?>
-<p:sld xmlns:p="http://schemas.openxmlformats.org/presentationml/2006/main">
+<p:sld xmlns:a="http://schemas.openxmlformats.org/drawingml/2006/main" xmlns:ma14="http://schemas.microsoft.com/office/drawing/2014/main" xmlns:p="http://schemas.openxmlformats.org/presentationml/2006/main" xmlns:p14="http://schemas.microsoft.com/office/powerpoint/2010/main" xmlns:r="http://schemas.openxmlformats.org/officeDocument/2006/relationships">
   <p:cSld>
     <p:bg>
       <p:bgPr>
-        <a:solidFill xmlns:a="http://schemas.openxmlformats.org/drawingml/2006/main">
+        <a:solidFill>
           <a:srgbClr val="F4F7F9"/>
         </a:solidFill>
+        <a:effectLst/>
       </p:bgPr>
     </p:bg>
     <p:spTree>
@@ -1084,40 +739,45 @@
         <p:nvPr/>
       </p:nvGrpSpPr>
       <p:grpSpPr>
-        <a:xfrm xmlns:a="http://schemas.openxmlformats.org/drawingml/2006/main"/>
+        <a:xfrm>
+          <a:off x="0" y="0"/>
+          <a:ext cx="0" cy="0"/>
+          <a:chOff x="0" y="0"/>
+          <a:chExt cx="0" cy="0"/>
+        </a:xfrm>
       </p:grpSpPr>
       <p:sp>
         <p:nvSpPr>
           <p:cNvPr id="43" name="poster-eyebrow">
-            <a:extLst xmlns:a="http://schemas.openxmlformats.org/drawingml/2006/main">
-              <a:ext uri="{FF2B5EF4-FFF2-40B4-BE49-F238E27FC236}">
-                <a16:creationId xmlns:a16="http://schemas.microsoft.com/office/drawing/2014/main" id="{E08A73F4-AF3B-4FB9-9199-6E75EBE57C78}"/>
-              </a:ext>
-            </a:extLst>
-          </p:cNvPr>
-          <p:cNvSpPr>
-            <a:spLocks xmlns:a="http://schemas.openxmlformats.org/drawingml/2006/main" noGrp="1"/>
-          </p:cNvSpPr>
-          <p:nvPr/>
-        </p:nvSpPr>
-        <p:spPr>
-          <a:xfrm xmlns:a="http://schemas.openxmlformats.org/drawingml/2006/main">
+            <a:extLst>
+              <a:ext uri="{FF2B5EF4-FFF2-40B4-BE49-F238E27FC236}">
+                <ma14:creationId id="{E08A73F4-AF3B-4FB9-9199-6E75EBE57C78}"/>
+              </a:ext>
+            </a:extLst>
+          </p:cNvPr>
+          <p:cNvSpPr>
+            <a:spLocks noGrp="1"/>
+          </p:cNvSpPr>
+          <p:nvPr/>
+        </p:nvSpPr>
+        <p:spPr>
+          <a:xfrm>
             <a:off x="476250" y="219075"/>
             <a:ext cx="5905500" cy="228600"/>
           </a:xfrm>
-          <a:prstGeom xmlns:a="http://schemas.openxmlformats.org/drawingml/2006/main" prst="rect">
-            <a:avLst/>
-          </a:prstGeom>
-          <a:noFill xmlns:a="http://schemas.openxmlformats.org/drawingml/2006/main"/>
-          <a:ln xmlns:a="http://schemas.openxmlformats.org/drawingml/2006/main" w="0">
+          <a:prstGeom prst="rect">
+            <a:avLst/>
+          </a:prstGeom>
+          <a:noFill/>
+          <a:ln w="0">
             <a:noFill/>
             <a:prstDash val="solid"/>
           </a:ln>
         </p:spPr>
         <p:txBody>
-          <a:bodyPr xmlns:a="http://schemas.openxmlformats.org/drawingml/2006/main"/>
-          <a:lstStyle xmlns:a="http://schemas.openxmlformats.org/drawingml/2006/main"/>
-          <a:p xmlns:a="http://schemas.openxmlformats.org/drawingml/2006/main">
+          <a:bodyPr/>
+          <a:lstStyle/>
+          <a:p>
             <a:pPr algn="l">
               <a:defRPr sz="1200" b="1">
                 <a:solidFill>
@@ -1139,35 +799,35 @@
       <p:sp>
         <p:nvSpPr>
           <p:cNvPr id="2" name="poster-title">
-            <a:extLst xmlns:a="http://schemas.openxmlformats.org/drawingml/2006/main">
-              <a:ext uri="{FF2B5EF4-FFF2-40B4-BE49-F238E27FC236}">
-                <a16:creationId xmlns:a16="http://schemas.microsoft.com/office/drawing/2014/main" id="{E8B61170-807C-41C5-A9C3-D1CB68BCC6F7}"/>
-              </a:ext>
-            </a:extLst>
-          </p:cNvPr>
-          <p:cNvSpPr>
-            <a:spLocks xmlns:a="http://schemas.openxmlformats.org/drawingml/2006/main" noGrp="1"/>
-          </p:cNvSpPr>
-          <p:nvPr/>
-        </p:nvSpPr>
-        <p:spPr>
-          <a:xfrm xmlns:a="http://schemas.openxmlformats.org/drawingml/2006/main">
+            <a:extLst>
+              <a:ext uri="{FF2B5EF4-FFF2-40B4-BE49-F238E27FC236}">
+                <ma14:creationId id="{E8B61170-807C-41C5-A9C3-D1CB68BCC6F7}"/>
+              </a:ext>
+            </a:extLst>
+          </p:cNvPr>
+          <p:cNvSpPr>
+            <a:spLocks noGrp="1"/>
+          </p:cNvSpPr>
+          <p:nvPr/>
+        </p:nvSpPr>
+        <p:spPr>
+          <a:xfrm>
             <a:off x="476250" y="447675"/>
             <a:ext cx="11334750" cy="533400"/>
           </a:xfrm>
-          <a:prstGeom xmlns:a="http://schemas.openxmlformats.org/drawingml/2006/main" prst="rect">
-            <a:avLst/>
-          </a:prstGeom>
-          <a:noFill xmlns:a="http://schemas.openxmlformats.org/drawingml/2006/main"/>
-          <a:ln xmlns:a="http://schemas.openxmlformats.org/drawingml/2006/main" w="0">
+          <a:prstGeom prst="rect">
+            <a:avLst/>
+          </a:prstGeom>
+          <a:noFill/>
+          <a:ln w="0">
             <a:noFill/>
             <a:prstDash val="solid"/>
           </a:ln>
         </p:spPr>
         <p:txBody>
-          <a:bodyPr xmlns:a="http://schemas.openxmlformats.org/drawingml/2006/main"/>
-          <a:lstStyle xmlns:a="http://schemas.openxmlformats.org/drawingml/2006/main"/>
-          <a:p xmlns:a="http://schemas.openxmlformats.org/drawingml/2006/main">
+          <a:bodyPr/>
+          <a:lstStyle/>
+          <a:p>
             <a:pPr algn="l">
               <a:defRPr sz="3750" b="1">
                 <a:solidFill>
@@ -1189,35 +849,35 @@
       <p:sp>
         <p:nvSpPr>
           <p:cNvPr id="3" name="poster-subtitle">
-            <a:extLst xmlns:a="http://schemas.openxmlformats.org/drawingml/2006/main">
-              <a:ext uri="{FF2B5EF4-FFF2-40B4-BE49-F238E27FC236}">
-                <a16:creationId xmlns:a16="http://schemas.microsoft.com/office/drawing/2014/main" id="{2A870308-500A-4C5D-8D3A-3876E006D13F}"/>
-              </a:ext>
-            </a:extLst>
-          </p:cNvPr>
-          <p:cNvSpPr>
-            <a:spLocks xmlns:a="http://schemas.openxmlformats.org/drawingml/2006/main" noGrp="1"/>
-          </p:cNvSpPr>
-          <p:nvPr/>
-        </p:nvSpPr>
-        <p:spPr>
-          <a:xfrm xmlns:a="http://schemas.openxmlformats.org/drawingml/2006/main">
+            <a:extLst>
+              <a:ext uri="{FF2B5EF4-FFF2-40B4-BE49-F238E27FC236}">
+                <ma14:creationId id="{2A870308-500A-4C5D-8D3A-3876E006D13F}"/>
+              </a:ext>
+            </a:extLst>
+          </p:cNvPr>
+          <p:cNvSpPr>
+            <a:spLocks noGrp="1"/>
+          </p:cNvSpPr>
+          <p:nvPr/>
+        </p:nvSpPr>
+        <p:spPr>
+          <a:xfrm>
             <a:off x="495300" y="962025"/>
             <a:ext cx="9620250" cy="276225"/>
           </a:xfrm>
-          <a:prstGeom xmlns:a="http://schemas.openxmlformats.org/drawingml/2006/main" prst="rect">
-            <a:avLst/>
-          </a:prstGeom>
-          <a:noFill xmlns:a="http://schemas.openxmlformats.org/drawingml/2006/main"/>
-          <a:ln xmlns:a="http://schemas.openxmlformats.org/drawingml/2006/main" w="0">
+          <a:prstGeom prst="rect">
+            <a:avLst/>
+          </a:prstGeom>
+          <a:noFill/>
+          <a:ln w="0">
             <a:noFill/>
             <a:prstDash val="solid"/>
           </a:ln>
         </p:spPr>
         <p:txBody>
-          <a:bodyPr xmlns:a="http://schemas.openxmlformats.org/drawingml/2006/main"/>
-          <a:lstStyle xmlns:a="http://schemas.openxmlformats.org/drawingml/2006/main"/>
-          <a:p xmlns:a="http://schemas.openxmlformats.org/drawingml/2006/main">
+          <a:bodyPr/>
+          <a:lstStyle/>
+          <a:p>
             <a:pPr algn="l">
               <a:defRPr sz="1500" b="0">
                 <a:solidFill>
@@ -1239,37 +899,37 @@
       <p:sp>
         <p:nvSpPr>
           <p:cNvPr id="4" name="course-label">
-            <a:extLst xmlns:a="http://schemas.openxmlformats.org/drawingml/2006/main">
-              <a:ext uri="{FF2B5EF4-FFF2-40B4-BE49-F238E27FC236}">
-                <a16:creationId xmlns:a16="http://schemas.microsoft.com/office/drawing/2014/main" id="{090F4A22-E112-478E-A19E-78AB5EA8286A}"/>
-              </a:ext>
-            </a:extLst>
-          </p:cNvPr>
-          <p:cNvSpPr>
-            <a:spLocks xmlns:a="http://schemas.openxmlformats.org/drawingml/2006/main" noGrp="1"/>
-          </p:cNvSpPr>
-          <p:nvPr/>
-        </p:nvSpPr>
-        <p:spPr>
-          <a:xfrm xmlns:a="http://schemas.openxmlformats.org/drawingml/2006/main">
+            <a:extLst>
+              <a:ext uri="{FF2B5EF4-FFF2-40B4-BE49-F238E27FC236}">
+                <ma14:creationId id="{090F4A22-E112-478E-A19E-78AB5EA8286A}"/>
+              </a:ext>
+            </a:extLst>
+          </p:cNvPr>
+          <p:cNvSpPr>
+            <a:spLocks noGrp="1"/>
+          </p:cNvSpPr>
+          <p:nvPr/>
+        </p:nvSpPr>
+        <p:spPr>
+          <a:xfrm>
             <a:off x="12192000" y="381000"/>
             <a:ext cx="2571750" cy="590550"/>
           </a:xfrm>
-          <a:prstGeom xmlns:a="http://schemas.openxmlformats.org/drawingml/2006/main" prst="rect">
-            <a:avLst/>
-          </a:prstGeom>
-          <a:solidFill xmlns:a="http://schemas.openxmlformats.org/drawingml/2006/main">
+          <a:prstGeom prst="rect">
+            <a:avLst/>
+          </a:prstGeom>
+          <a:solidFill>
             <a:srgbClr val="183B56"/>
           </a:solidFill>
-          <a:ln xmlns:a="http://schemas.openxmlformats.org/drawingml/2006/main" w="0">
+          <a:ln w="0">
             <a:noFill/>
             <a:prstDash val="solid"/>
           </a:ln>
         </p:spPr>
         <p:txBody>
-          <a:bodyPr xmlns:a="http://schemas.openxmlformats.org/drawingml/2006/main"/>
-          <a:lstStyle xmlns:a="http://schemas.openxmlformats.org/drawingml/2006/main"/>
-          <a:p xmlns:a="http://schemas.openxmlformats.org/drawingml/2006/main">
+          <a:bodyPr/>
+          <a:lstStyle/>
+          <a:p>
             <a:pPr algn="ctr">
               <a:defRPr sz="1200" b="1">
                 <a:solidFill>
@@ -1286,7 +946,7 @@
               <a:t>TEAM SLATEBLUE</a:t>
             </a:r>
           </a:p>
-          <a:p xmlns:a="http://schemas.openxmlformats.org/drawingml/2006/main">
+          <a:p>
             <a:pPr algn="ctr">
               <a:defRPr sz="1200" b="1">
                 <a:solidFill>
@@ -1308,66 +968,73 @@
       <p:sp>
         <p:nvSpPr>
           <p:cNvPr id="5" name="header-rule">
-            <a:extLst xmlns:a="http://schemas.openxmlformats.org/drawingml/2006/main">
-              <a:ext uri="{FF2B5EF4-FFF2-40B4-BE49-F238E27FC236}">
-                <a16:creationId xmlns:a16="http://schemas.microsoft.com/office/drawing/2014/main" id="{4721218B-854A-49AE-BF77-AC9B17BD412F}"/>
-              </a:ext>
-            </a:extLst>
-          </p:cNvPr>
-          <p:cNvSpPr>
-            <a:spLocks xmlns:a="http://schemas.openxmlformats.org/drawingml/2006/main" noGrp="1"/>
-          </p:cNvSpPr>
-          <p:nvPr/>
-        </p:nvSpPr>
-        <p:spPr>
-          <a:xfrm xmlns:a="http://schemas.openxmlformats.org/drawingml/2006/main">
+            <a:extLst>
+              <a:ext uri="{FF2B5EF4-FFF2-40B4-BE49-F238E27FC236}">
+                <ma14:creationId id="{4721218B-854A-49AE-BF77-AC9B17BD412F}"/>
+              </a:ext>
+            </a:extLst>
+          </p:cNvPr>
+          <p:cNvSpPr>
+            <a:spLocks noGrp="1"/>
+          </p:cNvSpPr>
+          <p:nvPr/>
+        </p:nvSpPr>
+        <p:spPr>
+          <a:xfrm>
             <a:off x="476250" y="1257300"/>
             <a:ext cx="14287500" cy="0"/>
           </a:xfrm>
-          <a:prstGeom xmlns:a="http://schemas.openxmlformats.org/drawingml/2006/main" prst="line">
-            <a:avLst/>
-          </a:prstGeom>
-          <a:noFill xmlns:a="http://schemas.openxmlformats.org/drawingml/2006/main"/>
-          <a:ln xmlns:a="http://schemas.openxmlformats.org/drawingml/2006/main" w="28575">
+          <a:prstGeom prst="line">
+            <a:avLst/>
+          </a:prstGeom>
+          <a:noFill/>
+          <a:ln w="28575">
             <a:solidFill>
               <a:srgbClr val="183B56"/>
             </a:solidFill>
             <a:prstDash val="solid"/>
           </a:ln>
         </p:spPr>
+        <p:txBody>
+          <a:bodyPr/>
+          <a:lstStyle/>
+          <a:p>
+            <a:endParaRPr lang="en-US"/>
+          </a:p>
+        </p:txBody>
       </p:sp>
       <p:sp>
         <p:nvSpPr>
           <p:cNvPr id="6" name="original-heading">
-            <a:extLst xmlns:a="http://schemas.openxmlformats.org/drawingml/2006/main">
-              <a:ext uri="{FF2B5EF4-FFF2-40B4-BE49-F238E27FC236}">
-                <a16:creationId xmlns:a16="http://schemas.microsoft.com/office/drawing/2014/main" id="{D7845612-A309-4213-A447-45EE0BDEA4E4}"/>
-              </a:ext>
-            </a:extLst>
-          </p:cNvPr>
-          <p:cNvSpPr>
-            <a:spLocks xmlns:a="http://schemas.openxmlformats.org/drawingml/2006/main" noGrp="1"/>
-          </p:cNvSpPr>
-          <p:nvPr/>
-        </p:nvSpPr>
-        <p:spPr>
-          <a:xfrm xmlns:a="http://schemas.openxmlformats.org/drawingml/2006/main">
+            <a:extLst>
+              <a:ext uri="{FF2B5EF4-FFF2-40B4-BE49-F238E27FC236}">
+                <ma14:creationId id="{D7845612-A309-4213-A447-45EE0BDEA4E4}"/>
+              </a:ext>
+            </a:extLst>
+          </p:cNvPr>
+          <p:cNvSpPr>
+            <a:spLocks noGrp="1"/>
+          </p:cNvSpPr>
+          <p:nvPr/>
+        </p:nvSpPr>
+        <p:spPr>
+          <a:xfrm>
             <a:off x="476250" y="1438275"/>
             <a:ext cx="4000500" cy="304800"/>
           </a:xfrm>
-          <a:prstGeom xmlns:a="http://schemas.openxmlformats.org/drawingml/2006/main" prst="rect">
-            <a:avLst/>
-          </a:prstGeom>
-          <a:noFill xmlns:a="http://schemas.openxmlformats.org/drawingml/2006/main"/>
-          <a:ln xmlns:a="http://schemas.openxmlformats.org/drawingml/2006/main" w="0">
+          <a:prstGeom prst="rect">
+            <a:avLst/>
+          </a:prstGeom>
+          <a:noFill/>
+          <a:ln w="0">
             <a:noFill/>
             <a:prstDash val="solid"/>
           </a:ln>
         </p:spPr>
         <p:txBody>
-          <a:bodyPr xmlns:a="http://schemas.openxmlformats.org/drawingml/2006/main"/>
-          <a:lstStyle xmlns:a="http://schemas.openxmlformats.org/drawingml/2006/main"/>
-          <a:p xmlns:a="http://schemas.openxmlformats.org/drawingml/2006/main">
+          <a:bodyPr/>
+          <a:lstStyle/>
+          <a:p>
             <a:pPr algn="l">
               <a:defRPr sz="1800" b="1">
                 <a:solidFill>
@@ -1389,56 +1056,63 @@
       <p:sp>
         <p:nvSpPr>
           <p:cNvPr id="7" name="original-image-frame">
-            <a:extLst xmlns:a="http://schemas.openxmlformats.org/drawingml/2006/main">
-              <a:ext uri="{FF2B5EF4-FFF2-40B4-BE49-F238E27FC236}">
-                <a16:creationId xmlns:a16="http://schemas.microsoft.com/office/drawing/2014/main" id="{9868A52F-0F2B-4F93-B202-28AFDC7E515D}"/>
-              </a:ext>
-            </a:extLst>
-          </p:cNvPr>
-          <p:cNvSpPr>
-            <a:spLocks xmlns:a="http://schemas.openxmlformats.org/drawingml/2006/main" noGrp="1"/>
-          </p:cNvSpPr>
-          <p:nvPr/>
-        </p:nvSpPr>
-        <p:spPr>
-          <a:xfrm xmlns:a="http://schemas.openxmlformats.org/drawingml/2006/main">
+            <a:extLst>
+              <a:ext uri="{FF2B5EF4-FFF2-40B4-BE49-F238E27FC236}">
+                <ma14:creationId id="{9868A52F-0F2B-4F93-B202-28AFDC7E515D}"/>
+              </a:ext>
+            </a:extLst>
+          </p:cNvPr>
+          <p:cNvSpPr>
+            <a:spLocks noGrp="1"/>
+          </p:cNvSpPr>
+          <p:nvPr/>
+        </p:nvSpPr>
+        <p:spPr>
+          <a:xfrm>
             <a:off x="476250" y="1790700"/>
             <a:ext cx="4000500" cy="2428875"/>
           </a:xfrm>
-          <a:prstGeom xmlns:a="http://schemas.openxmlformats.org/drawingml/2006/main" prst="roundRect">
+          <a:prstGeom prst="roundRect">
             <a:avLst>
               <a:gd name="adj" fmla="val 3922"/>
             </a:avLst>
           </a:prstGeom>
-          <a:solidFill xmlns:a="http://schemas.openxmlformats.org/drawingml/2006/main">
+          <a:solidFill>
             <a:srgbClr val="FFFFFF"/>
           </a:solidFill>
-          <a:ln xmlns:a="http://schemas.openxmlformats.org/drawingml/2006/main" w="9525">
+          <a:ln w="9525">
             <a:solidFill>
               <a:srgbClr val="D8E0E5"/>
             </a:solidFill>
             <a:prstDash val="solid"/>
           </a:ln>
         </p:spPr>
+        <p:txBody>
+          <a:bodyPr/>
+          <a:lstStyle/>
+          <a:p>
+            <a:endParaRPr lang="en-US"/>
+          </a:p>
+        </p:txBody>
       </p:sp>
       <p:pic>
         <p:nvPicPr>
-          <p:cNvPr id="50" name=""/>
+          <p:cNvPr id="50" name="Picture 49"/>
           <p:cNvPicPr>
-            <a:picLocks xmlns:a="http://schemas.openxmlformats.org/drawingml/2006/main" noChangeAspect="1"/>
+            <a:picLocks noChangeAspect="1"/>
           </p:cNvPicPr>
           <p:nvPr/>
         </p:nvPicPr>
         <p:blipFill>
-          <a:blip xmlns:r="http://schemas.openxmlformats.org/officeDocument/2006/relationships" xmlns:a="http://schemas.openxmlformats.org/drawingml/2006/main" r:embed="Ra81fabb25d964a73"/>
-          <a:stretch xmlns:a="http://schemas.openxmlformats.org/drawingml/2006/main"/>
+          <a:blip r:embed="rId3"/>
+          <a:stretch/>
         </p:blipFill>
         <p:spPr>
-          <a:xfrm xmlns:a="http://schemas.openxmlformats.org/drawingml/2006/main">
-            <a:off x="854751" y="1876425"/>
-            <a:ext cx="3243498" cy="2257425"/>
-          </a:xfrm>
-          <a:prstGeom xmlns:a="http://schemas.openxmlformats.org/drawingml/2006/main" prst="rect">
+          <a:xfrm>
+            <a:off x="820948" y="1838346"/>
+            <a:ext cx="3330153" cy="2317736"/>
+          </a:xfrm>
+          <a:prstGeom prst="rect">
             <a:avLst/>
           </a:prstGeom>
         </p:spPr>
@@ -1446,35 +1120,35 @@
       <p:sp>
         <p:nvSpPr>
           <p:cNvPr id="9" name="original-credit">
-            <a:extLst xmlns:a="http://schemas.openxmlformats.org/drawingml/2006/main">
-              <a:ext uri="{FF2B5EF4-FFF2-40B4-BE49-F238E27FC236}">
-                <a16:creationId xmlns:a16="http://schemas.microsoft.com/office/drawing/2014/main" id="{6C8419D4-7B52-40D4-A637-322E2D4DACB8}"/>
-              </a:ext>
-            </a:extLst>
-          </p:cNvPr>
-          <p:cNvSpPr>
-            <a:spLocks xmlns:a="http://schemas.openxmlformats.org/drawingml/2006/main" noGrp="1"/>
-          </p:cNvSpPr>
-          <p:nvPr/>
-        </p:nvSpPr>
-        <p:spPr>
-          <a:xfrm xmlns:a="http://schemas.openxmlformats.org/drawingml/2006/main">
+            <a:extLst>
+              <a:ext uri="{FF2B5EF4-FFF2-40B4-BE49-F238E27FC236}">
+                <ma14:creationId id="{6C8419D4-7B52-40D4-A637-322E2D4DACB8}"/>
+              </a:ext>
+            </a:extLst>
+          </p:cNvPr>
+          <p:cNvSpPr>
+            <a:spLocks noGrp="1"/>
+          </p:cNvSpPr>
+          <p:nvPr/>
+        </p:nvSpPr>
+        <p:spPr>
+          <a:xfrm>
             <a:off x="514350" y="4257675"/>
             <a:ext cx="3924300" cy="419100"/>
           </a:xfrm>
-          <a:prstGeom xmlns:a="http://schemas.openxmlformats.org/drawingml/2006/main" prst="rect">
-            <a:avLst/>
-          </a:prstGeom>
-          <a:noFill xmlns:a="http://schemas.openxmlformats.org/drawingml/2006/main"/>
-          <a:ln xmlns:a="http://schemas.openxmlformats.org/drawingml/2006/main" w="0">
+          <a:prstGeom prst="rect">
+            <a:avLst/>
+          </a:prstGeom>
+          <a:noFill/>
+          <a:ln w="0">
             <a:noFill/>
             <a:prstDash val="solid"/>
           </a:ln>
         </p:spPr>
         <p:txBody>
-          <a:bodyPr xmlns:a="http://schemas.openxmlformats.org/drawingml/2006/main"/>
-          <a:lstStyle xmlns:a="http://schemas.openxmlformats.org/drawingml/2006/main"/>
-          <a:p xmlns:a="http://schemas.openxmlformats.org/drawingml/2006/main">
+          <a:bodyPr/>
+          <a:lstStyle/>
+          <a:p>
             <a:pPr algn="l">
               <a:defRPr sz="1200" b="0">
                 <a:solidFill>
@@ -1491,7 +1165,7 @@
               <a:t>Credit: Carbon Brief (2024)</a:t>
             </a:r>
           </a:p>
-          <a:p xmlns:a="http://schemas.openxmlformats.org/drawingml/2006/main">
+          <a:p>
             <a:pPr algn="l">
               <a:defRPr sz="1200" b="0">
                 <a:solidFill>
@@ -1513,66 +1187,73 @@
       <p:sp>
         <p:nvSpPr>
           <p:cNvPr id="10" name="left-divider">
-            <a:extLst xmlns:a="http://schemas.openxmlformats.org/drawingml/2006/main">
-              <a:ext uri="{FF2B5EF4-FFF2-40B4-BE49-F238E27FC236}">
-                <a16:creationId xmlns:a16="http://schemas.microsoft.com/office/drawing/2014/main" id="{84BA1672-618F-4A5D-AA17-2AD159FA8C07}"/>
-              </a:ext>
-            </a:extLst>
-          </p:cNvPr>
-          <p:cNvSpPr>
-            <a:spLocks xmlns:a="http://schemas.openxmlformats.org/drawingml/2006/main" noGrp="1"/>
-          </p:cNvSpPr>
-          <p:nvPr/>
-        </p:nvSpPr>
-        <p:spPr>
-          <a:xfrm xmlns:a="http://schemas.openxmlformats.org/drawingml/2006/main">
+            <a:extLst>
+              <a:ext uri="{FF2B5EF4-FFF2-40B4-BE49-F238E27FC236}">
+                <ma14:creationId id="{84BA1672-618F-4A5D-AA17-2AD159FA8C07}"/>
+              </a:ext>
+            </a:extLst>
+          </p:cNvPr>
+          <p:cNvSpPr>
+            <a:spLocks noGrp="1"/>
+          </p:cNvSpPr>
+          <p:nvPr/>
+        </p:nvSpPr>
+        <p:spPr>
+          <a:xfrm>
             <a:off x="476250" y="4762500"/>
             <a:ext cx="4000500" cy="0"/>
           </a:xfrm>
-          <a:prstGeom xmlns:a="http://schemas.openxmlformats.org/drawingml/2006/main" prst="line">
-            <a:avLst/>
-          </a:prstGeom>
-          <a:noFill xmlns:a="http://schemas.openxmlformats.org/drawingml/2006/main"/>
-          <a:ln xmlns:a="http://schemas.openxmlformats.org/drawingml/2006/main" w="38100">
+          <a:prstGeom prst="line">
+            <a:avLst/>
+          </a:prstGeom>
+          <a:noFill/>
+          <a:ln w="38100">
             <a:solidFill>
               <a:srgbClr val="B34700"/>
             </a:solidFill>
             <a:prstDash val="solid"/>
           </a:ln>
         </p:spPr>
+        <p:txBody>
+          <a:bodyPr/>
+          <a:lstStyle/>
+          <a:p>
+            <a:endParaRPr lang="en-US"/>
+          </a:p>
+        </p:txBody>
       </p:sp>
       <p:sp>
         <p:nvSpPr>
           <p:cNvPr id="11" name="critique-heading">
-            <a:extLst xmlns:a="http://schemas.openxmlformats.org/drawingml/2006/main">
-              <a:ext uri="{FF2B5EF4-FFF2-40B4-BE49-F238E27FC236}">
-                <a16:creationId xmlns:a16="http://schemas.microsoft.com/office/drawing/2014/main" id="{2C358AD1-F061-41A0-A616-AD9065AED82B}"/>
-              </a:ext>
-            </a:extLst>
-          </p:cNvPr>
-          <p:cNvSpPr>
-            <a:spLocks xmlns:a="http://schemas.openxmlformats.org/drawingml/2006/main" noGrp="1"/>
-          </p:cNvSpPr>
-          <p:nvPr/>
-        </p:nvSpPr>
-        <p:spPr>
-          <a:xfrm xmlns:a="http://schemas.openxmlformats.org/drawingml/2006/main">
+            <a:extLst>
+              <a:ext uri="{FF2B5EF4-FFF2-40B4-BE49-F238E27FC236}">
+                <ma14:creationId id="{2C358AD1-F061-41A0-A616-AD9065AED82B}"/>
+              </a:ext>
+            </a:extLst>
+          </p:cNvPr>
+          <p:cNvSpPr>
+            <a:spLocks noGrp="1"/>
+          </p:cNvSpPr>
+          <p:nvPr/>
+        </p:nvSpPr>
+        <p:spPr>
+          <a:xfrm>
             <a:off x="476250" y="4876800"/>
             <a:ext cx="4000500" cy="304800"/>
           </a:xfrm>
-          <a:prstGeom xmlns:a="http://schemas.openxmlformats.org/drawingml/2006/main" prst="rect">
-            <a:avLst/>
-          </a:prstGeom>
-          <a:noFill xmlns:a="http://schemas.openxmlformats.org/drawingml/2006/main"/>
-          <a:ln xmlns:a="http://schemas.openxmlformats.org/drawingml/2006/main" w="0">
+          <a:prstGeom prst="rect">
+            <a:avLst/>
+          </a:prstGeom>
+          <a:noFill/>
+          <a:ln w="0">
             <a:noFill/>
             <a:prstDash val="solid"/>
           </a:ln>
         </p:spPr>
         <p:txBody>
-          <a:bodyPr xmlns:a="http://schemas.openxmlformats.org/drawingml/2006/main"/>
-          <a:lstStyle xmlns:a="http://schemas.openxmlformats.org/drawingml/2006/main"/>
-          <a:p xmlns:a="http://schemas.openxmlformats.org/drawingml/2006/main">
+          <a:bodyPr/>
+          <a:lstStyle/>
+          <a:p>
             <a:pPr algn="l">
               <a:defRPr sz="1800" b="1">
                 <a:solidFill>
@@ -1594,35 +1275,35 @@
       <p:sp>
         <p:nvSpPr>
           <p:cNvPr id="12" name="critique-item-1">
-            <a:extLst xmlns:a="http://schemas.openxmlformats.org/drawingml/2006/main">
-              <a:ext uri="{FF2B5EF4-FFF2-40B4-BE49-F238E27FC236}">
-                <a16:creationId xmlns:a16="http://schemas.microsoft.com/office/drawing/2014/main" id="{54BEEE7E-810E-4B36-B263-15F8038FB857}"/>
-              </a:ext>
-            </a:extLst>
-          </p:cNvPr>
-          <p:cNvSpPr>
-            <a:spLocks xmlns:a="http://schemas.openxmlformats.org/drawingml/2006/main" noGrp="1"/>
-          </p:cNvSpPr>
-          <p:nvPr/>
-        </p:nvSpPr>
-        <p:spPr>
-          <a:xfrm xmlns:a="http://schemas.openxmlformats.org/drawingml/2006/main">
+            <a:extLst>
+              <a:ext uri="{FF2B5EF4-FFF2-40B4-BE49-F238E27FC236}">
+                <ma14:creationId id="{54BEEE7E-810E-4B36-B263-15F8038FB857}"/>
+              </a:ext>
+            </a:extLst>
+          </p:cNvPr>
+          <p:cNvSpPr>
+            <a:spLocks noGrp="1"/>
+          </p:cNvSpPr>
+          <p:nvPr/>
+        </p:nvSpPr>
+        <p:spPr>
+          <a:xfrm>
             <a:off x="571500" y="5219700"/>
             <a:ext cx="3829050" cy="419100"/>
           </a:xfrm>
-          <a:prstGeom xmlns:a="http://schemas.openxmlformats.org/drawingml/2006/main" prst="rect">
-            <a:avLst/>
-          </a:prstGeom>
-          <a:noFill xmlns:a="http://schemas.openxmlformats.org/drawingml/2006/main"/>
-          <a:ln xmlns:a="http://schemas.openxmlformats.org/drawingml/2006/main" w="0">
+          <a:prstGeom prst="rect">
+            <a:avLst/>
+          </a:prstGeom>
+          <a:noFill/>
+          <a:ln w="0">
             <a:noFill/>
             <a:prstDash val="solid"/>
           </a:ln>
         </p:spPr>
         <p:txBody>
-          <a:bodyPr xmlns:a="http://schemas.openxmlformats.org/drawingml/2006/main"/>
-          <a:lstStyle xmlns:a="http://schemas.openxmlformats.org/drawingml/2006/main"/>
-          <a:p xmlns:a="http://schemas.openxmlformats.org/drawingml/2006/main">
+          <a:bodyPr/>
+          <a:lstStyle/>
+          <a:p>
             <a:pPr algn="l">
               <a:defRPr sz="1200" b="0">
                 <a:solidFill>
@@ -1644,35 +1325,35 @@
       <p:sp>
         <p:nvSpPr>
           <p:cNvPr id="13" name="critique-item-2">
-            <a:extLst xmlns:a="http://schemas.openxmlformats.org/drawingml/2006/main">
-              <a:ext uri="{FF2B5EF4-FFF2-40B4-BE49-F238E27FC236}">
-                <a16:creationId xmlns:a16="http://schemas.microsoft.com/office/drawing/2014/main" id="{28654507-EED0-43F0-9D5A-6768F6B9DFFC}"/>
-              </a:ext>
-            </a:extLst>
-          </p:cNvPr>
-          <p:cNvSpPr>
-            <a:spLocks xmlns:a="http://schemas.openxmlformats.org/drawingml/2006/main" noGrp="1"/>
-          </p:cNvSpPr>
-          <p:nvPr/>
-        </p:nvSpPr>
-        <p:spPr>
-          <a:xfrm xmlns:a="http://schemas.openxmlformats.org/drawingml/2006/main">
+            <a:extLst>
+              <a:ext uri="{FF2B5EF4-FFF2-40B4-BE49-F238E27FC236}">
+                <ma14:creationId id="{28654507-EED0-43F0-9D5A-6768F6B9DFFC}"/>
+              </a:ext>
+            </a:extLst>
+          </p:cNvPr>
+          <p:cNvSpPr>
+            <a:spLocks noGrp="1"/>
+          </p:cNvSpPr>
+          <p:nvPr/>
+        </p:nvSpPr>
+        <p:spPr>
+          <a:xfrm>
             <a:off x="571500" y="5657850"/>
             <a:ext cx="3829050" cy="381000"/>
           </a:xfrm>
-          <a:prstGeom xmlns:a="http://schemas.openxmlformats.org/drawingml/2006/main" prst="rect">
-            <a:avLst/>
-          </a:prstGeom>
-          <a:noFill xmlns:a="http://schemas.openxmlformats.org/drawingml/2006/main"/>
-          <a:ln xmlns:a="http://schemas.openxmlformats.org/drawingml/2006/main" w="0">
+          <a:prstGeom prst="rect">
+            <a:avLst/>
+          </a:prstGeom>
+          <a:noFill/>
+          <a:ln w="0">
             <a:noFill/>
             <a:prstDash val="solid"/>
           </a:ln>
         </p:spPr>
         <p:txBody>
-          <a:bodyPr xmlns:a="http://schemas.openxmlformats.org/drawingml/2006/main"/>
-          <a:lstStyle xmlns:a="http://schemas.openxmlformats.org/drawingml/2006/main"/>
-          <a:p xmlns:a="http://schemas.openxmlformats.org/drawingml/2006/main">
+          <a:bodyPr/>
+          <a:lstStyle/>
+          <a:p>
             <a:pPr algn="l">
               <a:defRPr sz="1200" b="0">
                 <a:solidFill>
@@ -1694,35 +1375,35 @@
       <p:sp>
         <p:nvSpPr>
           <p:cNvPr id="14" name="critique-item-3">
-            <a:extLst xmlns:a="http://schemas.openxmlformats.org/drawingml/2006/main">
-              <a:ext uri="{FF2B5EF4-FFF2-40B4-BE49-F238E27FC236}">
-                <a16:creationId xmlns:a16="http://schemas.microsoft.com/office/drawing/2014/main" id="{A8E35460-0C76-49E7-8113-054A4DD2459D}"/>
-              </a:ext>
-            </a:extLst>
-          </p:cNvPr>
-          <p:cNvSpPr>
-            <a:spLocks xmlns:a="http://schemas.openxmlformats.org/drawingml/2006/main" noGrp="1"/>
-          </p:cNvSpPr>
-          <p:nvPr/>
-        </p:nvSpPr>
-        <p:spPr>
-          <a:xfrm xmlns:a="http://schemas.openxmlformats.org/drawingml/2006/main">
+            <a:extLst>
+              <a:ext uri="{FF2B5EF4-FFF2-40B4-BE49-F238E27FC236}">
+                <ma14:creationId id="{A8E35460-0C76-49E7-8113-054A4DD2459D}"/>
+              </a:ext>
+            </a:extLst>
+          </p:cNvPr>
+          <p:cNvSpPr>
+            <a:spLocks noGrp="1"/>
+          </p:cNvSpPr>
+          <p:nvPr/>
+        </p:nvSpPr>
+        <p:spPr>
+          <a:xfrm>
             <a:off x="571500" y="6057900"/>
             <a:ext cx="3829050" cy="381000"/>
           </a:xfrm>
-          <a:prstGeom xmlns:a="http://schemas.openxmlformats.org/drawingml/2006/main" prst="rect">
-            <a:avLst/>
-          </a:prstGeom>
-          <a:noFill xmlns:a="http://schemas.openxmlformats.org/drawingml/2006/main"/>
-          <a:ln xmlns:a="http://schemas.openxmlformats.org/drawingml/2006/main" w="0">
+          <a:prstGeom prst="rect">
+            <a:avLst/>
+          </a:prstGeom>
+          <a:noFill/>
+          <a:ln w="0">
             <a:noFill/>
             <a:prstDash val="solid"/>
           </a:ln>
         </p:spPr>
         <p:txBody>
-          <a:bodyPr xmlns:a="http://schemas.openxmlformats.org/drawingml/2006/main"/>
-          <a:lstStyle xmlns:a="http://schemas.openxmlformats.org/drawingml/2006/main"/>
-          <a:p xmlns:a="http://schemas.openxmlformats.org/drawingml/2006/main">
+          <a:bodyPr/>
+          <a:lstStyle/>
+          <a:p>
             <a:pPr algn="l">
               <a:defRPr sz="1200" b="0">
                 <a:solidFill>
@@ -1744,35 +1425,35 @@
       <p:sp>
         <p:nvSpPr>
           <p:cNvPr id="15" name="critique-item-4">
-            <a:extLst xmlns:a="http://schemas.openxmlformats.org/drawingml/2006/main">
-              <a:ext uri="{FF2B5EF4-FFF2-40B4-BE49-F238E27FC236}">
-                <a16:creationId xmlns:a16="http://schemas.microsoft.com/office/drawing/2014/main" id="{FF747383-EB2D-4FE0-B3C8-9F0265A7AC62}"/>
-              </a:ext>
-            </a:extLst>
-          </p:cNvPr>
-          <p:cNvSpPr>
-            <a:spLocks xmlns:a="http://schemas.openxmlformats.org/drawingml/2006/main" noGrp="1"/>
-          </p:cNvSpPr>
-          <p:nvPr/>
-        </p:nvSpPr>
-        <p:spPr>
-          <a:xfrm xmlns:a="http://schemas.openxmlformats.org/drawingml/2006/main">
+            <a:extLst>
+              <a:ext uri="{FF2B5EF4-FFF2-40B4-BE49-F238E27FC236}">
+                <ma14:creationId id="{FF747383-EB2D-4FE0-B3C8-9F0265A7AC62}"/>
+              </a:ext>
+            </a:extLst>
+          </p:cNvPr>
+          <p:cNvSpPr>
+            <a:spLocks noGrp="1"/>
+          </p:cNvSpPr>
+          <p:nvPr/>
+        </p:nvSpPr>
+        <p:spPr>
+          <a:xfrm>
             <a:off x="571500" y="6457950"/>
             <a:ext cx="3829050" cy="285750"/>
           </a:xfrm>
-          <a:prstGeom xmlns:a="http://schemas.openxmlformats.org/drawingml/2006/main" prst="rect">
-            <a:avLst/>
-          </a:prstGeom>
-          <a:noFill xmlns:a="http://schemas.openxmlformats.org/drawingml/2006/main"/>
-          <a:ln xmlns:a="http://schemas.openxmlformats.org/drawingml/2006/main" w="0">
+          <a:prstGeom prst="rect">
+            <a:avLst/>
+          </a:prstGeom>
+          <a:noFill/>
+          <a:ln w="0">
             <a:noFill/>
             <a:prstDash val="solid"/>
           </a:ln>
         </p:spPr>
         <p:txBody>
-          <a:bodyPr xmlns:a="http://schemas.openxmlformats.org/drawingml/2006/main"/>
-          <a:lstStyle xmlns:a="http://schemas.openxmlformats.org/drawingml/2006/main"/>
-          <a:p xmlns:a="http://schemas.openxmlformats.org/drawingml/2006/main">
+          <a:bodyPr/>
+          <a:lstStyle/>
+          <a:p>
             <a:pPr algn="l">
               <a:defRPr sz="1200" b="0">
                 <a:solidFill>
@@ -1794,35 +1475,35 @@
       <p:sp>
         <p:nvSpPr>
           <p:cNvPr id="16" name="improved-heading">
-            <a:extLst xmlns:a="http://schemas.openxmlformats.org/drawingml/2006/main">
-              <a:ext uri="{FF2B5EF4-FFF2-40B4-BE49-F238E27FC236}">
-                <a16:creationId xmlns:a16="http://schemas.microsoft.com/office/drawing/2014/main" id="{028ADC3E-E420-4598-8203-105158713BE6}"/>
-              </a:ext>
-            </a:extLst>
-          </p:cNvPr>
-          <p:cNvSpPr>
-            <a:spLocks xmlns:a="http://schemas.openxmlformats.org/drawingml/2006/main" noGrp="1"/>
-          </p:cNvSpPr>
-          <p:nvPr/>
-        </p:nvSpPr>
-        <p:spPr>
-          <a:xfrm xmlns:a="http://schemas.openxmlformats.org/drawingml/2006/main">
+            <a:extLst>
+              <a:ext uri="{FF2B5EF4-FFF2-40B4-BE49-F238E27FC236}">
+                <ma14:creationId id="{028ADC3E-E420-4598-8203-105158713BE6}"/>
+              </a:ext>
+            </a:extLst>
+          </p:cNvPr>
+          <p:cNvSpPr>
+            <a:spLocks noGrp="1"/>
+          </p:cNvSpPr>
+          <p:nvPr/>
+        </p:nvSpPr>
+        <p:spPr>
+          <a:xfrm>
             <a:off x="4810125" y="1438275"/>
             <a:ext cx="7048500" cy="304800"/>
           </a:xfrm>
-          <a:prstGeom xmlns:a="http://schemas.openxmlformats.org/drawingml/2006/main" prst="rect">
-            <a:avLst/>
-          </a:prstGeom>
-          <a:noFill xmlns:a="http://schemas.openxmlformats.org/drawingml/2006/main"/>
-          <a:ln xmlns:a="http://schemas.openxmlformats.org/drawingml/2006/main" w="0">
+          <a:prstGeom prst="rect">
+            <a:avLst/>
+          </a:prstGeom>
+          <a:noFill/>
+          <a:ln w="0">
             <a:noFill/>
             <a:prstDash val="solid"/>
           </a:ln>
         </p:spPr>
         <p:txBody>
-          <a:bodyPr xmlns:a="http://schemas.openxmlformats.org/drawingml/2006/main"/>
-          <a:lstStyle xmlns:a="http://schemas.openxmlformats.org/drawingml/2006/main"/>
-          <a:p xmlns:a="http://schemas.openxmlformats.org/drawingml/2006/main">
+          <a:bodyPr/>
+          <a:lstStyle/>
+          <a:p>
             <a:pPr algn="l">
               <a:defRPr sz="2100" b="1">
                 <a:solidFill>
@@ -1844,56 +1525,66 @@
       <p:sp>
         <p:nvSpPr>
           <p:cNvPr id="17" name="improved-image-frame">
-            <a:extLst xmlns:a="http://schemas.openxmlformats.org/drawingml/2006/main">
-              <a:ext uri="{FF2B5EF4-FFF2-40B4-BE49-F238E27FC236}">
-                <a16:creationId xmlns:a16="http://schemas.microsoft.com/office/drawing/2014/main" id="{90F028F8-7D50-4E87-ACB1-2203FBCFAE86}"/>
-              </a:ext>
-            </a:extLst>
-          </p:cNvPr>
-          <p:cNvSpPr>
-            <a:spLocks xmlns:a="http://schemas.openxmlformats.org/drawingml/2006/main" noGrp="1"/>
-          </p:cNvSpPr>
-          <p:nvPr/>
-        </p:nvSpPr>
-        <p:spPr>
-          <a:xfrm xmlns:a="http://schemas.openxmlformats.org/drawingml/2006/main">
+            <a:extLst>
+              <a:ext uri="{FF2B5EF4-FFF2-40B4-BE49-F238E27FC236}">
+                <ma14:creationId id="{90F028F8-7D50-4E87-ACB1-2203FBCFAE86}"/>
+              </a:ext>
+            </a:extLst>
+          </p:cNvPr>
+          <p:cNvSpPr>
+            <a:spLocks noGrp="1"/>
+          </p:cNvSpPr>
+          <p:nvPr/>
+        </p:nvSpPr>
+        <p:spPr>
+          <a:xfrm>
             <a:off x="4762500" y="1790700"/>
             <a:ext cx="7143750" cy="4857750"/>
           </a:xfrm>
-          <a:prstGeom xmlns:a="http://schemas.openxmlformats.org/drawingml/2006/main" prst="roundRect">
+          <a:prstGeom prst="roundRect">
             <a:avLst>
               <a:gd name="adj" fmla="val 1569"/>
             </a:avLst>
           </a:prstGeom>
-          <a:solidFill xmlns:a="http://schemas.openxmlformats.org/drawingml/2006/main">
+          <a:solidFill>
             <a:srgbClr val="FFFFFF"/>
           </a:solidFill>
-          <a:ln xmlns:a="http://schemas.openxmlformats.org/drawingml/2006/main" w="19050">
+          <a:ln w="19050">
             <a:solidFill>
               <a:srgbClr val="0072B2"/>
             </a:solidFill>
             <a:prstDash val="solid"/>
           </a:ln>
         </p:spPr>
+        <p:txBody>
+          <a:bodyPr/>
+          <a:lstStyle/>
+          <a:p>
+            <a:endParaRPr lang="en-US"/>
+          </a:p>
+        </p:txBody>
       </p:sp>
       <p:pic>
         <p:nvPicPr>
-          <p:cNvPr id="60" name=""/>
+          <p:cNvPr id="60" name="Picture 59"/>
           <p:cNvPicPr>
-            <a:picLocks xmlns:a="http://schemas.openxmlformats.org/drawingml/2006/main" noChangeAspect="1"/>
+            <a:picLocks noChangeAspect="1"/>
           </p:cNvPicPr>
           <p:nvPr/>
         </p:nvPicPr>
         <p:blipFill>
-          <a:blip xmlns:r="http://schemas.openxmlformats.org/officeDocument/2006/relationships" xmlns:a="http://schemas.openxmlformats.org/drawingml/2006/main" r:embed="R631864a955624118"/>
-          <a:stretch xmlns:a="http://schemas.openxmlformats.org/drawingml/2006/main"/>
+          <a:blip r:embed="rId4"/>
+          <a:srcRect l="9888" t="9818" r="7845" b="6358"/>
+          <a:stretch>
+            <a:fillRect/>
+          </a:stretch>
         </p:blipFill>
         <p:spPr>
-          <a:xfrm xmlns:a="http://schemas.openxmlformats.org/drawingml/2006/main">
-            <a:off x="5032093" y="1885950"/>
-            <a:ext cx="6604564" cy="4667250"/>
-          </a:xfrm>
-          <a:prstGeom xmlns:a="http://schemas.openxmlformats.org/drawingml/2006/main" prst="rect">
+          <a:xfrm>
+            <a:off x="5087360" y="1886733"/>
+            <a:ext cx="6494029" cy="4676014"/>
+          </a:xfrm>
+          <a:prstGeom prst="rect">
             <a:avLst/>
           </a:prstGeom>
         </p:spPr>
@@ -1901,70 +1592,77 @@
       <p:sp>
         <p:nvSpPr>
           <p:cNvPr id="19" name="right-context-surface">
-            <a:extLst xmlns:a="http://schemas.openxmlformats.org/drawingml/2006/main">
-              <a:ext uri="{FF2B5EF4-FFF2-40B4-BE49-F238E27FC236}">
-                <a16:creationId xmlns:a16="http://schemas.microsoft.com/office/drawing/2014/main" id="{84E17126-4A42-4FF3-9F8E-2722F6467CF0}"/>
-              </a:ext>
-            </a:extLst>
-          </p:cNvPr>
-          <p:cNvSpPr>
-            <a:spLocks xmlns:a="http://schemas.openxmlformats.org/drawingml/2006/main" noGrp="1"/>
-          </p:cNvSpPr>
-          <p:nvPr/>
-        </p:nvSpPr>
-        <p:spPr>
-          <a:xfrm xmlns:a="http://schemas.openxmlformats.org/drawingml/2006/main">
+            <a:extLst>
+              <a:ext uri="{FF2B5EF4-FFF2-40B4-BE49-F238E27FC236}">
+                <ma14:creationId id="{84E17126-4A42-4FF3-9F8E-2722F6467CF0}"/>
+              </a:ext>
+            </a:extLst>
+          </p:cNvPr>
+          <p:cNvSpPr>
+            <a:spLocks noGrp="1"/>
+          </p:cNvSpPr>
+          <p:nvPr/>
+        </p:nvSpPr>
+        <p:spPr>
+          <a:xfrm>
             <a:off x="12096750" y="1438275"/>
             <a:ext cx="2667000" cy="5210175"/>
           </a:xfrm>
-          <a:prstGeom xmlns:a="http://schemas.openxmlformats.org/drawingml/2006/main" prst="roundRect">
+          <a:prstGeom prst="roundRect">
             <a:avLst>
               <a:gd name="adj" fmla="val 2857"/>
             </a:avLst>
           </a:prstGeom>
-          <a:solidFill xmlns:a="http://schemas.openxmlformats.org/drawingml/2006/main">
+          <a:solidFill>
             <a:srgbClr val="FFFFFF"/>
           </a:solidFill>
-          <a:ln xmlns:a="http://schemas.openxmlformats.org/drawingml/2006/main" w="9525">
+          <a:ln w="9525">
             <a:solidFill>
               <a:srgbClr val="D8E0E5"/>
             </a:solidFill>
             <a:prstDash val="solid"/>
           </a:ln>
         </p:spPr>
+        <p:txBody>
+          <a:bodyPr/>
+          <a:lstStyle/>
+          <a:p>
+            <a:endParaRPr lang="en-US"/>
+          </a:p>
+        </p:txBody>
       </p:sp>
       <p:sp>
         <p:nvSpPr>
           <p:cNvPr id="20" name="redesign-heading">
-            <a:extLst xmlns:a="http://schemas.openxmlformats.org/drawingml/2006/main">
-              <a:ext uri="{FF2B5EF4-FFF2-40B4-BE49-F238E27FC236}">
-                <a16:creationId xmlns:a16="http://schemas.microsoft.com/office/drawing/2014/main" id="{74F50EA3-E7A0-43C9-9346-B545829B9925}"/>
-              </a:ext>
-            </a:extLst>
-          </p:cNvPr>
-          <p:cNvSpPr>
-            <a:spLocks xmlns:a="http://schemas.openxmlformats.org/drawingml/2006/main" noGrp="1"/>
-          </p:cNvSpPr>
-          <p:nvPr/>
-        </p:nvSpPr>
-        <p:spPr>
-          <a:xfrm xmlns:a="http://schemas.openxmlformats.org/drawingml/2006/main">
+            <a:extLst>
+              <a:ext uri="{FF2B5EF4-FFF2-40B4-BE49-F238E27FC236}">
+                <ma14:creationId id="{74F50EA3-E7A0-43C9-9346-B545829B9925}"/>
+              </a:ext>
+            </a:extLst>
+          </p:cNvPr>
+          <p:cNvSpPr>
+            <a:spLocks noGrp="1"/>
+          </p:cNvSpPr>
+          <p:nvPr/>
+        </p:nvSpPr>
+        <p:spPr>
+          <a:xfrm>
             <a:off x="12287250" y="1609725"/>
             <a:ext cx="2286000" cy="514350"/>
           </a:xfrm>
-          <a:prstGeom xmlns:a="http://schemas.openxmlformats.org/drawingml/2006/main" prst="rect">
-            <a:avLst/>
-          </a:prstGeom>
-          <a:noFill xmlns:a="http://schemas.openxmlformats.org/drawingml/2006/main"/>
-          <a:ln xmlns:a="http://schemas.openxmlformats.org/drawingml/2006/main" w="0">
+          <a:prstGeom prst="rect">
+            <a:avLst/>
+          </a:prstGeom>
+          <a:noFill/>
+          <a:ln w="0">
             <a:noFill/>
             <a:prstDash val="solid"/>
           </a:ln>
         </p:spPr>
         <p:txBody>
-          <a:bodyPr xmlns:a="http://schemas.openxmlformats.org/drawingml/2006/main"/>
-          <a:lstStyle xmlns:a="http://schemas.openxmlformats.org/drawingml/2006/main"/>
-          <a:p xmlns:a="http://schemas.openxmlformats.org/drawingml/2006/main">
+          <a:bodyPr/>
+          <a:lstStyle/>
+          <a:p>
             <a:pPr algn="l">
               <a:defRPr sz="1800" b="1">
                 <a:solidFill>
@@ -1978,7 +1676,7 @@
                   <a:srgbClr val="0072B2"/>
                 </a:solidFill>
               </a:rPr>
-              <a:t>WHY THE REDESIGN WORKS</a:t>
+              <a:t>WHY IT WORKS</a:t>
             </a:r>
           </a:p>
         </p:txBody>
@@ -1986,35 +1684,35 @@
       <p:sp>
         <p:nvSpPr>
           <p:cNvPr id="21" name="redesign-item-1">
-            <a:extLst xmlns:a="http://schemas.openxmlformats.org/drawingml/2006/main">
-              <a:ext uri="{FF2B5EF4-FFF2-40B4-BE49-F238E27FC236}">
-                <a16:creationId xmlns:a16="http://schemas.microsoft.com/office/drawing/2014/main" id="{3E3B26D5-EEF7-4CFB-A635-FD58A2003410}"/>
-              </a:ext>
-            </a:extLst>
-          </p:cNvPr>
-          <p:cNvSpPr>
-            <a:spLocks xmlns:a="http://schemas.openxmlformats.org/drawingml/2006/main" noGrp="1"/>
-          </p:cNvSpPr>
-          <p:nvPr/>
-        </p:nvSpPr>
-        <p:spPr>
-          <a:xfrm xmlns:a="http://schemas.openxmlformats.org/drawingml/2006/main">
+            <a:extLst>
+              <a:ext uri="{FF2B5EF4-FFF2-40B4-BE49-F238E27FC236}">
+                <ma14:creationId id="{3E3B26D5-EEF7-4CFB-A635-FD58A2003410}"/>
+              </a:ext>
+            </a:extLst>
+          </p:cNvPr>
+          <p:cNvSpPr>
+            <a:spLocks noGrp="1"/>
+          </p:cNvSpPr>
+          <p:nvPr/>
+        </p:nvSpPr>
+        <p:spPr>
+          <a:xfrm>
             <a:off x="12287250" y="2162175"/>
             <a:ext cx="2305050" cy="419100"/>
           </a:xfrm>
-          <a:prstGeom xmlns:a="http://schemas.openxmlformats.org/drawingml/2006/main" prst="rect">
-            <a:avLst/>
-          </a:prstGeom>
-          <a:noFill xmlns:a="http://schemas.openxmlformats.org/drawingml/2006/main"/>
-          <a:ln xmlns:a="http://schemas.openxmlformats.org/drawingml/2006/main" w="0">
+          <a:prstGeom prst="rect">
+            <a:avLst/>
+          </a:prstGeom>
+          <a:noFill/>
+          <a:ln w="0">
             <a:noFill/>
             <a:prstDash val="solid"/>
           </a:ln>
         </p:spPr>
         <p:txBody>
-          <a:bodyPr xmlns:a="http://schemas.openxmlformats.org/drawingml/2006/main"/>
-          <a:lstStyle xmlns:a="http://schemas.openxmlformats.org/drawingml/2006/main"/>
-          <a:p xmlns:a="http://schemas.openxmlformats.org/drawingml/2006/main">
+          <a:bodyPr/>
+          <a:lstStyle/>
+          <a:p>
             <a:pPr algn="l">
               <a:defRPr sz="1200" b="0">
                 <a:solidFill>
@@ -2036,35 +1734,35 @@
       <p:sp>
         <p:nvSpPr>
           <p:cNvPr id="22" name="redesign-item-2">
-            <a:extLst xmlns:a="http://schemas.openxmlformats.org/drawingml/2006/main">
-              <a:ext uri="{FF2B5EF4-FFF2-40B4-BE49-F238E27FC236}">
-                <a16:creationId xmlns:a16="http://schemas.microsoft.com/office/drawing/2014/main" id="{0346C853-5271-4D29-BE11-CDB38807DAFC}"/>
-              </a:ext>
-            </a:extLst>
-          </p:cNvPr>
-          <p:cNvSpPr>
-            <a:spLocks xmlns:a="http://schemas.openxmlformats.org/drawingml/2006/main" noGrp="1"/>
-          </p:cNvSpPr>
-          <p:nvPr/>
-        </p:nvSpPr>
-        <p:spPr>
-          <a:xfrm xmlns:a="http://schemas.openxmlformats.org/drawingml/2006/main">
+            <a:extLst>
+              <a:ext uri="{FF2B5EF4-FFF2-40B4-BE49-F238E27FC236}">
+                <ma14:creationId id="{0346C853-5271-4D29-BE11-CDB38807DAFC}"/>
+              </a:ext>
+            </a:extLst>
+          </p:cNvPr>
+          <p:cNvSpPr>
+            <a:spLocks noGrp="1"/>
+          </p:cNvSpPr>
+          <p:nvPr/>
+        </p:nvSpPr>
+        <p:spPr>
+          <a:xfrm>
             <a:off x="12287250" y="2600325"/>
             <a:ext cx="2305050" cy="419100"/>
           </a:xfrm>
-          <a:prstGeom xmlns:a="http://schemas.openxmlformats.org/drawingml/2006/main" prst="rect">
-            <a:avLst/>
-          </a:prstGeom>
-          <a:noFill xmlns:a="http://schemas.openxmlformats.org/drawingml/2006/main"/>
-          <a:ln xmlns:a="http://schemas.openxmlformats.org/drawingml/2006/main" w="0">
+          <a:prstGeom prst="rect">
+            <a:avLst/>
+          </a:prstGeom>
+          <a:noFill/>
+          <a:ln w="0">
             <a:noFill/>
             <a:prstDash val="solid"/>
           </a:ln>
         </p:spPr>
         <p:txBody>
-          <a:bodyPr xmlns:a="http://schemas.openxmlformats.org/drawingml/2006/main"/>
-          <a:lstStyle xmlns:a="http://schemas.openxmlformats.org/drawingml/2006/main"/>
-          <a:p xmlns:a="http://schemas.openxmlformats.org/drawingml/2006/main">
+          <a:bodyPr/>
+          <a:lstStyle/>
+          <a:p>
             <a:pPr algn="l">
               <a:defRPr sz="1200" b="0">
                 <a:solidFill>
@@ -2086,35 +1784,35 @@
       <p:sp>
         <p:nvSpPr>
           <p:cNvPr id="23" name="redesign-item-3">
-            <a:extLst xmlns:a="http://schemas.openxmlformats.org/drawingml/2006/main">
-              <a:ext uri="{FF2B5EF4-FFF2-40B4-BE49-F238E27FC236}">
-                <a16:creationId xmlns:a16="http://schemas.microsoft.com/office/drawing/2014/main" id="{AE473FA0-362D-4D9D-9BC1-FA5BE6106E52}"/>
-              </a:ext>
-            </a:extLst>
-          </p:cNvPr>
-          <p:cNvSpPr>
-            <a:spLocks xmlns:a="http://schemas.openxmlformats.org/drawingml/2006/main" noGrp="1"/>
-          </p:cNvSpPr>
-          <p:nvPr/>
-        </p:nvSpPr>
-        <p:spPr>
-          <a:xfrm xmlns:a="http://schemas.openxmlformats.org/drawingml/2006/main">
+            <a:extLst>
+              <a:ext uri="{FF2B5EF4-FFF2-40B4-BE49-F238E27FC236}">
+                <ma14:creationId id="{AE473FA0-362D-4D9D-9BC1-FA5BE6106E52}"/>
+              </a:ext>
+            </a:extLst>
+          </p:cNvPr>
+          <p:cNvSpPr>
+            <a:spLocks noGrp="1"/>
+          </p:cNvSpPr>
+          <p:nvPr/>
+        </p:nvSpPr>
+        <p:spPr>
+          <a:xfrm>
             <a:off x="12287250" y="3038475"/>
             <a:ext cx="2305050" cy="419100"/>
           </a:xfrm>
-          <a:prstGeom xmlns:a="http://schemas.openxmlformats.org/drawingml/2006/main" prst="rect">
-            <a:avLst/>
-          </a:prstGeom>
-          <a:noFill xmlns:a="http://schemas.openxmlformats.org/drawingml/2006/main"/>
-          <a:ln xmlns:a="http://schemas.openxmlformats.org/drawingml/2006/main" w="0">
+          <a:prstGeom prst="rect">
+            <a:avLst/>
+          </a:prstGeom>
+          <a:noFill/>
+          <a:ln w="0">
             <a:noFill/>
             <a:prstDash val="solid"/>
           </a:ln>
         </p:spPr>
         <p:txBody>
-          <a:bodyPr xmlns:a="http://schemas.openxmlformats.org/drawingml/2006/main"/>
-          <a:lstStyle xmlns:a="http://schemas.openxmlformats.org/drawingml/2006/main"/>
-          <a:p xmlns:a="http://schemas.openxmlformats.org/drawingml/2006/main">
+          <a:bodyPr/>
+          <a:lstStyle/>
+          <a:p>
             <a:pPr algn="l">
               <a:defRPr sz="1200" b="0">
                 <a:solidFill>
@@ -2136,35 +1834,35 @@
       <p:sp>
         <p:nvSpPr>
           <p:cNvPr id="24" name="redesign-item-4">
-            <a:extLst xmlns:a="http://schemas.openxmlformats.org/drawingml/2006/main">
-              <a:ext uri="{FF2B5EF4-FFF2-40B4-BE49-F238E27FC236}">
-                <a16:creationId xmlns:a16="http://schemas.microsoft.com/office/drawing/2014/main" id="{28D55F55-6A55-4537-BB84-1B39534AB0FA}"/>
-              </a:ext>
-            </a:extLst>
-          </p:cNvPr>
-          <p:cNvSpPr>
-            <a:spLocks xmlns:a="http://schemas.openxmlformats.org/drawingml/2006/main" noGrp="1"/>
-          </p:cNvSpPr>
-          <p:nvPr/>
-        </p:nvSpPr>
-        <p:spPr>
-          <a:xfrm xmlns:a="http://schemas.openxmlformats.org/drawingml/2006/main">
+            <a:extLst>
+              <a:ext uri="{FF2B5EF4-FFF2-40B4-BE49-F238E27FC236}">
+                <ma14:creationId id="{28D55F55-6A55-4537-BB84-1B39534AB0FA}"/>
+              </a:ext>
+            </a:extLst>
+          </p:cNvPr>
+          <p:cNvSpPr>
+            <a:spLocks noGrp="1"/>
+          </p:cNvSpPr>
+          <p:nvPr/>
+        </p:nvSpPr>
+        <p:spPr>
+          <a:xfrm>
             <a:off x="12287250" y="3476625"/>
             <a:ext cx="2305050" cy="476250"/>
           </a:xfrm>
-          <a:prstGeom xmlns:a="http://schemas.openxmlformats.org/drawingml/2006/main" prst="rect">
-            <a:avLst/>
-          </a:prstGeom>
-          <a:noFill xmlns:a="http://schemas.openxmlformats.org/drawingml/2006/main"/>
-          <a:ln xmlns:a="http://schemas.openxmlformats.org/drawingml/2006/main" w="0">
+          <a:prstGeom prst="rect">
+            <a:avLst/>
+          </a:prstGeom>
+          <a:noFill/>
+          <a:ln w="0">
             <a:noFill/>
             <a:prstDash val="solid"/>
           </a:ln>
         </p:spPr>
         <p:txBody>
-          <a:bodyPr xmlns:a="http://schemas.openxmlformats.org/drawingml/2006/main"/>
-          <a:lstStyle xmlns:a="http://schemas.openxmlformats.org/drawingml/2006/main"/>
-          <a:p xmlns:a="http://schemas.openxmlformats.org/drawingml/2006/main">
+          <a:bodyPr/>
+          <a:lstStyle/>
+          <a:p>
             <a:pPr algn="l">
               <a:defRPr sz="1200" b="0">
                 <a:solidFill>
@@ -2186,66 +1884,73 @@
       <p:sp>
         <p:nvSpPr>
           <p:cNvPr id="25" name="context-divider">
-            <a:extLst xmlns:a="http://schemas.openxmlformats.org/drawingml/2006/main">
-              <a:ext uri="{FF2B5EF4-FFF2-40B4-BE49-F238E27FC236}">
-                <a16:creationId xmlns:a16="http://schemas.microsoft.com/office/drawing/2014/main" id="{C9AF6790-74A4-42AD-ABAE-E4528EED11B1}"/>
-              </a:ext>
-            </a:extLst>
-          </p:cNvPr>
-          <p:cNvSpPr>
-            <a:spLocks xmlns:a="http://schemas.openxmlformats.org/drawingml/2006/main" noGrp="1"/>
-          </p:cNvSpPr>
-          <p:nvPr/>
-        </p:nvSpPr>
-        <p:spPr>
-          <a:xfrm xmlns:a="http://schemas.openxmlformats.org/drawingml/2006/main">
+            <a:extLst>
+              <a:ext uri="{FF2B5EF4-FFF2-40B4-BE49-F238E27FC236}">
+                <ma14:creationId id="{C9AF6790-74A4-42AD-ABAE-E4528EED11B1}"/>
+              </a:ext>
+            </a:extLst>
+          </p:cNvPr>
+          <p:cNvSpPr>
+            <a:spLocks noGrp="1"/>
+          </p:cNvSpPr>
+          <p:nvPr/>
+        </p:nvSpPr>
+        <p:spPr>
+          <a:xfrm>
             <a:off x="12287250" y="4067175"/>
             <a:ext cx="2266950" cy="0"/>
           </a:xfrm>
-          <a:prstGeom xmlns:a="http://schemas.openxmlformats.org/drawingml/2006/main" prst="line">
-            <a:avLst/>
-          </a:prstGeom>
-          <a:noFill xmlns:a="http://schemas.openxmlformats.org/drawingml/2006/main"/>
-          <a:ln xmlns:a="http://schemas.openxmlformats.org/drawingml/2006/main" w="19050">
+          <a:prstGeom prst="line">
+            <a:avLst/>
+          </a:prstGeom>
+          <a:noFill/>
+          <a:ln w="19050">
             <a:solidFill>
               <a:srgbClr val="D8E0E5"/>
             </a:solidFill>
             <a:prstDash val="solid"/>
           </a:ln>
         </p:spPr>
+        <p:txBody>
+          <a:bodyPr/>
+          <a:lstStyle/>
+          <a:p>
+            <a:endParaRPr lang="en-US"/>
+          </a:p>
+        </p:txBody>
       </p:sp>
       <p:sp>
         <p:nvSpPr>
           <p:cNvPr id="26" name="data-heading">
-            <a:extLst xmlns:a="http://schemas.openxmlformats.org/drawingml/2006/main">
-              <a:ext uri="{FF2B5EF4-FFF2-40B4-BE49-F238E27FC236}">
-                <a16:creationId xmlns:a16="http://schemas.microsoft.com/office/drawing/2014/main" id="{F0D2B5C4-4F9C-4629-A542-02693F6A7570}"/>
-              </a:ext>
-            </a:extLst>
-          </p:cNvPr>
-          <p:cNvSpPr>
-            <a:spLocks xmlns:a="http://schemas.openxmlformats.org/drawingml/2006/main" noGrp="1"/>
-          </p:cNvSpPr>
-          <p:nvPr/>
-        </p:nvSpPr>
-        <p:spPr>
-          <a:xfrm xmlns:a="http://schemas.openxmlformats.org/drawingml/2006/main">
+            <a:extLst>
+              <a:ext uri="{FF2B5EF4-FFF2-40B4-BE49-F238E27FC236}">
+                <ma14:creationId id="{F0D2B5C4-4F9C-4629-A542-02693F6A7570}"/>
+              </a:ext>
+            </a:extLst>
+          </p:cNvPr>
+          <p:cNvSpPr>
+            <a:spLocks noGrp="1"/>
+          </p:cNvSpPr>
+          <p:nvPr/>
+        </p:nvSpPr>
+        <p:spPr>
+          <a:xfrm>
             <a:off x="12287250" y="4171950"/>
             <a:ext cx="2266950" cy="323850"/>
           </a:xfrm>
-          <a:prstGeom xmlns:a="http://schemas.openxmlformats.org/drawingml/2006/main" prst="rect">
-            <a:avLst/>
-          </a:prstGeom>
-          <a:noFill xmlns:a="http://schemas.openxmlformats.org/drawingml/2006/main"/>
-          <a:ln xmlns:a="http://schemas.openxmlformats.org/drawingml/2006/main" w="0">
+          <a:prstGeom prst="rect">
+            <a:avLst/>
+          </a:prstGeom>
+          <a:noFill/>
+          <a:ln w="0">
             <a:noFill/>
             <a:prstDash val="solid"/>
           </a:ln>
         </p:spPr>
         <p:txBody>
-          <a:bodyPr xmlns:a="http://schemas.openxmlformats.org/drawingml/2006/main"/>
-          <a:lstStyle xmlns:a="http://schemas.openxmlformats.org/drawingml/2006/main"/>
-          <a:p xmlns:a="http://schemas.openxmlformats.org/drawingml/2006/main">
+          <a:bodyPr/>
+          <a:lstStyle/>
+          <a:p>
             <a:pPr algn="l">
               <a:defRPr sz="1800" b="1">
                 <a:solidFill>
@@ -2267,35 +1972,35 @@
       <p:sp>
         <p:nvSpPr>
           <p:cNvPr id="27" name="data-emissions">
-            <a:extLst xmlns:a="http://schemas.openxmlformats.org/drawingml/2006/main">
-              <a:ext uri="{FF2B5EF4-FFF2-40B4-BE49-F238E27FC236}">
-                <a16:creationId xmlns:a16="http://schemas.microsoft.com/office/drawing/2014/main" id="{8CBBB212-A1ED-468E-B4D7-1E5EDC173F83}"/>
-              </a:ext>
-            </a:extLst>
-          </p:cNvPr>
-          <p:cNvSpPr>
-            <a:spLocks xmlns:a="http://schemas.openxmlformats.org/drawingml/2006/main" noGrp="1"/>
-          </p:cNvSpPr>
-          <p:nvPr/>
-        </p:nvSpPr>
-        <p:spPr>
-          <a:xfrm xmlns:a="http://schemas.openxmlformats.org/drawingml/2006/main">
+            <a:extLst>
+              <a:ext uri="{FF2B5EF4-FFF2-40B4-BE49-F238E27FC236}">
+                <ma14:creationId id="{8CBBB212-A1ED-468E-B4D7-1E5EDC173F83}"/>
+              </a:ext>
+            </a:extLst>
+          </p:cNvPr>
+          <p:cNvSpPr>
+            <a:spLocks noGrp="1"/>
+          </p:cNvSpPr>
+          <p:nvPr/>
+        </p:nvSpPr>
+        <p:spPr>
+          <a:xfrm>
             <a:off x="12287250" y="4524375"/>
             <a:ext cx="2286000" cy="685800"/>
           </a:xfrm>
-          <a:prstGeom xmlns:a="http://schemas.openxmlformats.org/drawingml/2006/main" prst="rect">
-            <a:avLst/>
-          </a:prstGeom>
-          <a:noFill xmlns:a="http://schemas.openxmlformats.org/drawingml/2006/main"/>
-          <a:ln xmlns:a="http://schemas.openxmlformats.org/drawingml/2006/main" w="0">
+          <a:prstGeom prst="rect">
+            <a:avLst/>
+          </a:prstGeom>
+          <a:noFill/>
+          <a:ln w="0">
             <a:noFill/>
             <a:prstDash val="solid"/>
           </a:ln>
         </p:spPr>
         <p:txBody>
-          <a:bodyPr xmlns:a="http://schemas.openxmlformats.org/drawingml/2006/main"/>
-          <a:lstStyle xmlns:a="http://schemas.openxmlformats.org/drawingml/2006/main"/>
-          <a:p xmlns:a="http://schemas.openxmlformats.org/drawingml/2006/main">
+          <a:bodyPr/>
+          <a:lstStyle/>
+          <a:p>
             <a:pPr algn="l">
               <a:defRPr sz="1200" b="0">
                 <a:solidFill>
@@ -2304,7 +2009,7 @@
               </a:defRPr>
             </a:pPr>
             <a:r>
-              <a:rPr sz="1200" b="0">
+              <a:rPr sz="1200" b="0" dirty="0">
                 <a:solidFill>
                   <a:srgbClr val="26323A"/>
                 </a:solidFill>
@@ -2312,7 +2017,7 @@
               <a:t>Emissions</a:t>
             </a:r>
           </a:p>
-          <a:p xmlns:a="http://schemas.openxmlformats.org/drawingml/2006/main">
+          <a:p>
             <a:pPr algn="l">
               <a:defRPr sz="1200" b="0">
                 <a:solidFill>
@@ -2321,7 +2026,7 @@
               </a:defRPr>
             </a:pPr>
             <a:r>
-              <a:rPr sz="1200" b="0">
+              <a:rPr sz="1200" b="0" dirty="0">
                 <a:solidFill>
                   <a:srgbClr val="26323A"/>
                 </a:solidFill>
@@ -2329,7 +2034,7 @@
               <a:t>Global Carbon Project</a:t>
             </a:r>
           </a:p>
-          <a:p xmlns:a="http://schemas.openxmlformats.org/drawingml/2006/main">
+          <a:p>
             <a:pPr algn="l">
               <a:defRPr sz="1200" b="0">
                 <a:solidFill>
@@ -2338,7 +2043,7 @@
               </a:defRPr>
             </a:pPr>
             <a:r>
-              <a:rPr sz="1200" b="0">
+              <a:rPr sz="1200" b="0" dirty="0">
                 <a:solidFill>
                   <a:srgbClr val="26323A"/>
                 </a:solidFill>
@@ -2351,35 +2056,35 @@
       <p:sp>
         <p:nvSpPr>
           <p:cNvPr id="28" name="data-population">
-            <a:extLst xmlns:a="http://schemas.openxmlformats.org/drawingml/2006/main">
-              <a:ext uri="{FF2B5EF4-FFF2-40B4-BE49-F238E27FC236}">
-                <a16:creationId xmlns:a16="http://schemas.microsoft.com/office/drawing/2014/main" id="{D469E2B5-59FB-4162-A57E-AC768AA840C6}"/>
-              </a:ext>
-            </a:extLst>
-          </p:cNvPr>
-          <p:cNvSpPr>
-            <a:spLocks xmlns:a="http://schemas.openxmlformats.org/drawingml/2006/main" noGrp="1"/>
-          </p:cNvSpPr>
-          <p:nvPr/>
-        </p:nvSpPr>
-        <p:spPr>
-          <a:xfrm xmlns:a="http://schemas.openxmlformats.org/drawingml/2006/main">
+            <a:extLst>
+              <a:ext uri="{FF2B5EF4-FFF2-40B4-BE49-F238E27FC236}">
+                <ma14:creationId id="{D469E2B5-59FB-4162-A57E-AC768AA840C6}"/>
+              </a:ext>
+            </a:extLst>
+          </p:cNvPr>
+          <p:cNvSpPr>
+            <a:spLocks noGrp="1"/>
+          </p:cNvSpPr>
+          <p:nvPr/>
+        </p:nvSpPr>
+        <p:spPr>
+          <a:xfrm>
             <a:off x="12287250" y="5219700"/>
             <a:ext cx="2286000" cy="400050"/>
           </a:xfrm>
-          <a:prstGeom xmlns:a="http://schemas.openxmlformats.org/drawingml/2006/main" prst="rect">
-            <a:avLst/>
-          </a:prstGeom>
-          <a:noFill xmlns:a="http://schemas.openxmlformats.org/drawingml/2006/main"/>
-          <a:ln xmlns:a="http://schemas.openxmlformats.org/drawingml/2006/main" w="0">
+          <a:prstGeom prst="rect">
+            <a:avLst/>
+          </a:prstGeom>
+          <a:noFill/>
+          <a:ln w="0">
             <a:noFill/>
             <a:prstDash val="solid"/>
           </a:ln>
         </p:spPr>
         <p:txBody>
-          <a:bodyPr xmlns:a="http://schemas.openxmlformats.org/drawingml/2006/main"/>
-          <a:lstStyle xmlns:a="http://schemas.openxmlformats.org/drawingml/2006/main"/>
-          <a:p xmlns:a="http://schemas.openxmlformats.org/drawingml/2006/main">
+          <a:bodyPr/>
+          <a:lstStyle/>
+          <a:p>
             <a:pPr algn="l">
               <a:defRPr sz="1200" b="0">
                 <a:solidFill>
@@ -2388,7 +2093,7 @@
               </a:defRPr>
             </a:pPr>
             <a:r>
-              <a:rPr sz="1200" b="0">
+              <a:rPr sz="1200" b="0" dirty="0">
                 <a:solidFill>
                   <a:srgbClr val="26323A"/>
                 </a:solidFill>
@@ -2396,7 +2101,7 @@
               <a:t>Population</a:t>
             </a:r>
           </a:p>
-          <a:p xmlns:a="http://schemas.openxmlformats.org/drawingml/2006/main">
+          <a:p>
             <a:pPr algn="l">
               <a:defRPr sz="1200" b="0">
                 <a:solidFill>
@@ -2405,7 +2110,7 @@
               </a:defRPr>
             </a:pPr>
             <a:r>
-              <a:rPr sz="1200" b="0">
+              <a:rPr sz="1200" b="0" dirty="0">
                 <a:solidFill>
                   <a:srgbClr val="26323A"/>
                 </a:solidFill>
@@ -2418,35 +2123,35 @@
       <p:sp>
         <p:nvSpPr>
           <p:cNvPr id="29" name="data-gdp">
-            <a:extLst xmlns:a="http://schemas.openxmlformats.org/drawingml/2006/main">
-              <a:ext uri="{FF2B5EF4-FFF2-40B4-BE49-F238E27FC236}">
-                <a16:creationId xmlns:a16="http://schemas.microsoft.com/office/drawing/2014/main" id="{84EAF8B0-BC7C-4E68-B2C3-CF36913C6F12}"/>
-              </a:ext>
-            </a:extLst>
-          </p:cNvPr>
-          <p:cNvSpPr>
-            <a:spLocks xmlns:a="http://schemas.openxmlformats.org/drawingml/2006/main" noGrp="1"/>
-          </p:cNvSpPr>
-          <p:nvPr/>
-        </p:nvSpPr>
-        <p:spPr>
-          <a:xfrm xmlns:a="http://schemas.openxmlformats.org/drawingml/2006/main">
+            <a:extLst>
+              <a:ext uri="{FF2B5EF4-FFF2-40B4-BE49-F238E27FC236}">
+                <ma14:creationId id="{84EAF8B0-BC7C-4E68-B2C3-CF36913C6F12}"/>
+              </a:ext>
+            </a:extLst>
+          </p:cNvPr>
+          <p:cNvSpPr>
+            <a:spLocks noGrp="1"/>
+          </p:cNvSpPr>
+          <p:nvPr/>
+        </p:nvSpPr>
+        <p:spPr>
+          <a:xfrm>
             <a:off x="12287250" y="5629275"/>
             <a:ext cx="2286000" cy="400050"/>
           </a:xfrm>
-          <a:prstGeom xmlns:a="http://schemas.openxmlformats.org/drawingml/2006/main" prst="rect">
-            <a:avLst/>
-          </a:prstGeom>
-          <a:noFill xmlns:a="http://schemas.openxmlformats.org/drawingml/2006/main"/>
-          <a:ln xmlns:a="http://schemas.openxmlformats.org/drawingml/2006/main" w="0">
+          <a:prstGeom prst="rect">
+            <a:avLst/>
+          </a:prstGeom>
+          <a:noFill/>
+          <a:ln w="0">
             <a:noFill/>
             <a:prstDash val="solid"/>
           </a:ln>
         </p:spPr>
         <p:txBody>
-          <a:bodyPr xmlns:a="http://schemas.openxmlformats.org/drawingml/2006/main"/>
-          <a:lstStyle xmlns:a="http://schemas.openxmlformats.org/drawingml/2006/main"/>
-          <a:p xmlns:a="http://schemas.openxmlformats.org/drawingml/2006/main">
+          <a:bodyPr/>
+          <a:lstStyle/>
+          <a:p>
             <a:pPr algn="l">
               <a:defRPr sz="1200" b="0">
                 <a:solidFill>
@@ -2455,7 +2160,7 @@
               </a:defRPr>
             </a:pPr>
             <a:r>
-              <a:rPr sz="1200" b="0">
+              <a:rPr sz="1200" b="0" dirty="0">
                 <a:solidFill>
                   <a:srgbClr val="26323A"/>
                 </a:solidFill>
@@ -2463,7 +2168,7 @@
               <a:t>GDP</a:t>
             </a:r>
           </a:p>
-          <a:p xmlns:a="http://schemas.openxmlformats.org/drawingml/2006/main">
+          <a:p>
             <a:pPr algn="l">
               <a:defRPr sz="1200" b="0">
                 <a:solidFill>
@@ -2472,7 +2177,7 @@
               </a:defRPr>
             </a:pPr>
             <a:r>
-              <a:rPr sz="1200" b="0">
+              <a:rPr sz="1200" b="0" dirty="0">
                 <a:solidFill>
                   <a:srgbClr val="26323A"/>
                 </a:solidFill>
@@ -2485,35 +2190,35 @@
       <p:sp>
         <p:nvSpPr>
           <p:cNvPr id="30" name="gdp-interpretation">
-            <a:extLst xmlns:a="http://schemas.openxmlformats.org/drawingml/2006/main">
-              <a:ext uri="{FF2B5EF4-FFF2-40B4-BE49-F238E27FC236}">
-                <a16:creationId xmlns:a16="http://schemas.microsoft.com/office/drawing/2014/main" id="{E932DB87-F094-4694-8C3C-EF781D36A277}"/>
-              </a:ext>
-            </a:extLst>
-          </p:cNvPr>
-          <p:cNvSpPr>
-            <a:spLocks xmlns:a="http://schemas.openxmlformats.org/drawingml/2006/main" noGrp="1"/>
-          </p:cNvSpPr>
-          <p:nvPr/>
-        </p:nvSpPr>
-        <p:spPr>
-          <a:xfrm xmlns:a="http://schemas.openxmlformats.org/drawingml/2006/main">
+            <a:extLst>
+              <a:ext uri="{FF2B5EF4-FFF2-40B4-BE49-F238E27FC236}">
+                <ma14:creationId id="{E932DB87-F094-4694-8C3C-EF781D36A277}"/>
+              </a:ext>
+            </a:extLst>
+          </p:cNvPr>
+          <p:cNvSpPr>
+            <a:spLocks noGrp="1"/>
+          </p:cNvSpPr>
+          <p:nvPr/>
+        </p:nvSpPr>
+        <p:spPr>
+          <a:xfrm>
             <a:off x="12287250" y="6038850"/>
             <a:ext cx="2286000" cy="552450"/>
           </a:xfrm>
-          <a:prstGeom xmlns:a="http://schemas.openxmlformats.org/drawingml/2006/main" prst="rect">
-            <a:avLst/>
-          </a:prstGeom>
-          <a:noFill xmlns:a="http://schemas.openxmlformats.org/drawingml/2006/main"/>
-          <a:ln xmlns:a="http://schemas.openxmlformats.org/drawingml/2006/main" w="0">
+          <a:prstGeom prst="rect">
+            <a:avLst/>
+          </a:prstGeom>
+          <a:noFill/>
+          <a:ln w="0">
             <a:noFill/>
             <a:prstDash val="solid"/>
           </a:ln>
         </p:spPr>
         <p:txBody>
-          <a:bodyPr xmlns:a="http://schemas.openxmlformats.org/drawingml/2006/main"/>
-          <a:lstStyle xmlns:a="http://schemas.openxmlformats.org/drawingml/2006/main"/>
-          <a:p xmlns:a="http://schemas.openxmlformats.org/drawingml/2006/main">
+          <a:bodyPr/>
+          <a:lstStyle/>
+          <a:p>
             <a:pPr algn="l">
               <a:defRPr sz="1200" b="0">
                 <a:solidFill>
@@ -2535,70 +2240,77 @@
       <p:sp>
         <p:nvSpPr>
           <p:cNvPr id="31" name="design-brief-surface">
-            <a:extLst xmlns:a="http://schemas.openxmlformats.org/drawingml/2006/main">
-              <a:ext uri="{FF2B5EF4-FFF2-40B4-BE49-F238E27FC236}">
-                <a16:creationId xmlns:a16="http://schemas.microsoft.com/office/drawing/2014/main" id="{A907F6A4-85B6-4A7F-A19B-75FCE59248A6}"/>
-              </a:ext>
-            </a:extLst>
-          </p:cNvPr>
-          <p:cNvSpPr>
-            <a:spLocks xmlns:a="http://schemas.openxmlformats.org/drawingml/2006/main" noGrp="1"/>
-          </p:cNvSpPr>
-          <p:nvPr/>
-        </p:nvSpPr>
-        <p:spPr>
-          <a:xfrm xmlns:a="http://schemas.openxmlformats.org/drawingml/2006/main">
+            <a:extLst>
+              <a:ext uri="{FF2B5EF4-FFF2-40B4-BE49-F238E27FC236}">
+                <ma14:creationId id="{A907F6A4-85B6-4A7F-A19B-75FCE59248A6}"/>
+              </a:ext>
+            </a:extLst>
+          </p:cNvPr>
+          <p:cNvSpPr>
+            <a:spLocks noGrp="1"/>
+          </p:cNvSpPr>
+          <p:nvPr/>
+        </p:nvSpPr>
+        <p:spPr>
+          <a:xfrm>
             <a:off x="476250" y="6781800"/>
             <a:ext cx="14287500" cy="1504950"/>
           </a:xfrm>
-          <a:prstGeom xmlns:a="http://schemas.openxmlformats.org/drawingml/2006/main" prst="roundRect">
+          <a:prstGeom prst="roundRect">
             <a:avLst>
               <a:gd name="adj" fmla="val 5063"/>
             </a:avLst>
           </a:prstGeom>
-          <a:solidFill xmlns:a="http://schemas.openxmlformats.org/drawingml/2006/main">
+          <a:solidFill>
             <a:srgbClr val="EAF3F8"/>
           </a:solidFill>
-          <a:ln xmlns:a="http://schemas.openxmlformats.org/drawingml/2006/main" w="9525">
+          <a:ln w="9525">
             <a:solidFill>
               <a:srgbClr val="B8D4E3"/>
             </a:solidFill>
             <a:prstDash val="solid"/>
           </a:ln>
         </p:spPr>
+        <p:txBody>
+          <a:bodyPr/>
+          <a:lstStyle/>
+          <a:p>
+            <a:endParaRPr lang="en-US"/>
+          </a:p>
+        </p:txBody>
       </p:sp>
       <p:sp>
         <p:nvSpPr>
           <p:cNvPr id="32" name="design-brief-heading">
-            <a:extLst xmlns:a="http://schemas.openxmlformats.org/drawingml/2006/main">
-              <a:ext uri="{FF2B5EF4-FFF2-40B4-BE49-F238E27FC236}">
-                <a16:creationId xmlns:a16="http://schemas.microsoft.com/office/drawing/2014/main" id="{9F70041F-ADF4-40E8-A3DD-C8866294561F}"/>
-              </a:ext>
-            </a:extLst>
-          </p:cNvPr>
-          <p:cNvSpPr>
-            <a:spLocks xmlns:a="http://schemas.openxmlformats.org/drawingml/2006/main" noGrp="1"/>
-          </p:cNvSpPr>
-          <p:nvPr/>
-        </p:nvSpPr>
-        <p:spPr>
-          <a:xfrm xmlns:a="http://schemas.openxmlformats.org/drawingml/2006/main">
+            <a:extLst>
+              <a:ext uri="{FF2B5EF4-FFF2-40B4-BE49-F238E27FC236}">
+                <ma14:creationId id="{9F70041F-ADF4-40E8-A3DD-C8866294561F}"/>
+              </a:ext>
+            </a:extLst>
+          </p:cNvPr>
+          <p:cNvSpPr>
+            <a:spLocks noGrp="1"/>
+          </p:cNvSpPr>
+          <p:nvPr/>
+        </p:nvSpPr>
+        <p:spPr>
+          <a:xfrm>
             <a:off x="666750" y="6867525"/>
             <a:ext cx="2857500" cy="295275"/>
           </a:xfrm>
-          <a:prstGeom xmlns:a="http://schemas.openxmlformats.org/drawingml/2006/main" prst="rect">
-            <a:avLst/>
-          </a:prstGeom>
-          <a:noFill xmlns:a="http://schemas.openxmlformats.org/drawingml/2006/main"/>
-          <a:ln xmlns:a="http://schemas.openxmlformats.org/drawingml/2006/main" w="0">
+          <a:prstGeom prst="rect">
+            <a:avLst/>
+          </a:prstGeom>
+          <a:noFill/>
+          <a:ln w="0">
             <a:noFill/>
             <a:prstDash val="solid"/>
           </a:ln>
         </p:spPr>
         <p:txBody>
-          <a:bodyPr xmlns:a="http://schemas.openxmlformats.org/drawingml/2006/main"/>
-          <a:lstStyle xmlns:a="http://schemas.openxmlformats.org/drawingml/2006/main"/>
-          <a:p xmlns:a="http://schemas.openxmlformats.org/drawingml/2006/main">
+          <a:bodyPr/>
+          <a:lstStyle/>
+          <a:p>
             <a:pPr algn="l">
               <a:defRPr sz="1800" b="1">
                 <a:solidFill>
@@ -2620,35 +2332,35 @@
       <p:sp>
         <p:nvSpPr>
           <p:cNvPr id="33" name="design-brief-audience">
-            <a:extLst xmlns:a="http://schemas.openxmlformats.org/drawingml/2006/main">
-              <a:ext uri="{FF2B5EF4-FFF2-40B4-BE49-F238E27FC236}">
-                <a16:creationId xmlns:a16="http://schemas.microsoft.com/office/drawing/2014/main" id="{E794E44D-05BE-4606-980E-823BDBC3A37F}"/>
-              </a:ext>
-            </a:extLst>
-          </p:cNvPr>
-          <p:cNvSpPr>
-            <a:spLocks xmlns:a="http://schemas.openxmlformats.org/drawingml/2006/main" noGrp="1"/>
-          </p:cNvSpPr>
-          <p:nvPr/>
-        </p:nvSpPr>
-        <p:spPr>
-          <a:xfrm xmlns:a="http://schemas.openxmlformats.org/drawingml/2006/main">
+            <a:extLst>
+              <a:ext uri="{FF2B5EF4-FFF2-40B4-BE49-F238E27FC236}">
+                <ma14:creationId id="{E794E44D-05BE-4606-980E-823BDBC3A37F}"/>
+              </a:ext>
+            </a:extLst>
+          </p:cNvPr>
+          <p:cNvSpPr>
+            <a:spLocks noGrp="1"/>
+          </p:cNvSpPr>
+          <p:nvPr/>
+        </p:nvSpPr>
+        <p:spPr>
+          <a:xfrm>
             <a:off x="666750" y="7153275"/>
             <a:ext cx="7143750" cy="1066800"/>
           </a:xfrm>
-          <a:prstGeom xmlns:a="http://schemas.openxmlformats.org/drawingml/2006/main" prst="rect">
-            <a:avLst/>
-          </a:prstGeom>
-          <a:noFill xmlns:a="http://schemas.openxmlformats.org/drawingml/2006/main"/>
-          <a:ln xmlns:a="http://schemas.openxmlformats.org/drawingml/2006/main" w="0">
+          <a:prstGeom prst="rect">
+            <a:avLst/>
+          </a:prstGeom>
+          <a:noFill/>
+          <a:ln w="0">
             <a:noFill/>
             <a:prstDash val="solid"/>
           </a:ln>
         </p:spPr>
         <p:txBody>
-          <a:bodyPr xmlns:a="http://schemas.openxmlformats.org/drawingml/2006/main"/>
-          <a:lstStyle xmlns:a="http://schemas.openxmlformats.org/drawingml/2006/main"/>
-          <a:p xmlns:a="http://schemas.openxmlformats.org/drawingml/2006/main">
+          <a:bodyPr/>
+          <a:lstStyle/>
+          <a:p>
             <a:pPr algn="l">
               <a:defRPr sz="1200" b="0">
                 <a:solidFill>
@@ -2670,66 +2382,73 @@
       <p:sp>
         <p:nvSpPr>
           <p:cNvPr id="34" name="brief-column-divider">
-            <a:extLst xmlns:a="http://schemas.openxmlformats.org/drawingml/2006/main">
-              <a:ext uri="{FF2B5EF4-FFF2-40B4-BE49-F238E27FC236}">
-                <a16:creationId xmlns:a16="http://schemas.microsoft.com/office/drawing/2014/main" id="{DA79E8F1-A9D2-4647-8A45-4910A0E588B5}"/>
-              </a:ext>
-            </a:extLst>
-          </p:cNvPr>
-          <p:cNvSpPr>
-            <a:spLocks xmlns:a="http://schemas.openxmlformats.org/drawingml/2006/main" noGrp="1"/>
-          </p:cNvSpPr>
-          <p:nvPr/>
-        </p:nvSpPr>
-        <p:spPr>
-          <a:xfrm xmlns:a="http://schemas.openxmlformats.org/drawingml/2006/main">
+            <a:extLst>
+              <a:ext uri="{FF2B5EF4-FFF2-40B4-BE49-F238E27FC236}">
+                <ma14:creationId id="{DA79E8F1-A9D2-4647-8A45-4910A0E588B5}"/>
+              </a:ext>
+            </a:extLst>
+          </p:cNvPr>
+          <p:cNvSpPr>
+            <a:spLocks noGrp="1"/>
+          </p:cNvSpPr>
+          <p:nvPr/>
+        </p:nvSpPr>
+        <p:spPr>
+          <a:xfrm>
             <a:off x="8058150" y="6953250"/>
             <a:ext cx="19050" cy="1181100"/>
           </a:xfrm>
-          <a:prstGeom xmlns:a="http://schemas.openxmlformats.org/drawingml/2006/main" prst="rect">
-            <a:avLst/>
-          </a:prstGeom>
-          <a:solidFill xmlns:a="http://schemas.openxmlformats.org/drawingml/2006/main">
+          <a:prstGeom prst="rect">
+            <a:avLst/>
+          </a:prstGeom>
+          <a:solidFill>
             <a:srgbClr val="B8D4E3"/>
           </a:solidFill>
-          <a:ln xmlns:a="http://schemas.openxmlformats.org/drawingml/2006/main" w="0">
+          <a:ln w="0">
             <a:noFill/>
             <a:prstDash val="solid"/>
           </a:ln>
         </p:spPr>
+        <p:txBody>
+          <a:bodyPr/>
+          <a:lstStyle/>
+          <a:p>
+            <a:endParaRPr lang="en-US"/>
+          </a:p>
+        </p:txBody>
       </p:sp>
       <p:sp>
         <p:nvSpPr>
           <p:cNvPr id="35" name="main-revisions-heading">
-            <a:extLst xmlns:a="http://schemas.openxmlformats.org/drawingml/2006/main">
-              <a:ext uri="{FF2B5EF4-FFF2-40B4-BE49-F238E27FC236}">
-                <a16:creationId xmlns:a16="http://schemas.microsoft.com/office/drawing/2014/main" id="{BE55EB57-41FB-4943-AFE3-5585C6BA7B2F}"/>
-              </a:ext>
-            </a:extLst>
-          </p:cNvPr>
-          <p:cNvSpPr>
-            <a:spLocks xmlns:a="http://schemas.openxmlformats.org/drawingml/2006/main" noGrp="1"/>
-          </p:cNvSpPr>
-          <p:nvPr/>
-        </p:nvSpPr>
-        <p:spPr>
-          <a:xfrm xmlns:a="http://schemas.openxmlformats.org/drawingml/2006/main">
+            <a:extLst>
+              <a:ext uri="{FF2B5EF4-FFF2-40B4-BE49-F238E27FC236}">
+                <ma14:creationId id="{BE55EB57-41FB-4943-AFE3-5585C6BA7B2F}"/>
+              </a:ext>
+            </a:extLst>
+          </p:cNvPr>
+          <p:cNvSpPr>
+            <a:spLocks noGrp="1"/>
+          </p:cNvSpPr>
+          <p:nvPr/>
+        </p:nvSpPr>
+        <p:spPr>
+          <a:xfrm>
             <a:off x="8334375" y="6867525"/>
             <a:ext cx="6143625" cy="266700"/>
           </a:xfrm>
-          <a:prstGeom xmlns:a="http://schemas.openxmlformats.org/drawingml/2006/main" prst="rect">
-            <a:avLst/>
-          </a:prstGeom>
-          <a:noFill xmlns:a="http://schemas.openxmlformats.org/drawingml/2006/main"/>
-          <a:ln xmlns:a="http://schemas.openxmlformats.org/drawingml/2006/main" w="0">
+          <a:prstGeom prst="rect">
+            <a:avLst/>
+          </a:prstGeom>
+          <a:noFill/>
+          <a:ln w="0">
             <a:noFill/>
             <a:prstDash val="solid"/>
           </a:ln>
         </p:spPr>
         <p:txBody>
-          <a:bodyPr xmlns:a="http://schemas.openxmlformats.org/drawingml/2006/main"/>
-          <a:lstStyle xmlns:a="http://schemas.openxmlformats.org/drawingml/2006/main"/>
-          <a:p xmlns:a="http://schemas.openxmlformats.org/drawingml/2006/main">
+          <a:bodyPr/>
+          <a:lstStyle/>
+          <a:p>
             <a:pPr algn="l">
               <a:defRPr sz="1350" b="1">
                 <a:solidFill>
@@ -2751,35 +2470,35 @@
       <p:sp>
         <p:nvSpPr>
           <p:cNvPr id="36" name="brief-item-1">
-            <a:extLst xmlns:a="http://schemas.openxmlformats.org/drawingml/2006/main">
-              <a:ext uri="{FF2B5EF4-FFF2-40B4-BE49-F238E27FC236}">
-                <a16:creationId xmlns:a16="http://schemas.microsoft.com/office/drawing/2014/main" id="{1A8B18F2-753B-4108-BAFD-3D0C19CB8764}"/>
-              </a:ext>
-            </a:extLst>
-          </p:cNvPr>
-          <p:cNvSpPr>
-            <a:spLocks xmlns:a="http://schemas.openxmlformats.org/drawingml/2006/main" noGrp="1"/>
-          </p:cNvSpPr>
-          <p:nvPr/>
-        </p:nvSpPr>
-        <p:spPr>
-          <a:xfrm xmlns:a="http://schemas.openxmlformats.org/drawingml/2006/main">
+            <a:extLst>
+              <a:ext uri="{FF2B5EF4-FFF2-40B4-BE49-F238E27FC236}">
+                <ma14:creationId id="{1A8B18F2-753B-4108-BAFD-3D0C19CB8764}"/>
+              </a:ext>
+            </a:extLst>
+          </p:cNvPr>
+          <p:cNvSpPr>
+            <a:spLocks noGrp="1"/>
+          </p:cNvSpPr>
+          <p:nvPr/>
+        </p:nvSpPr>
+        <p:spPr>
+          <a:xfrm>
             <a:off x="8334375" y="7067550"/>
             <a:ext cx="6143625" cy="200025"/>
           </a:xfrm>
-          <a:prstGeom xmlns:a="http://schemas.openxmlformats.org/drawingml/2006/main" prst="rect">
-            <a:avLst/>
-          </a:prstGeom>
-          <a:noFill xmlns:a="http://schemas.openxmlformats.org/drawingml/2006/main"/>
-          <a:ln xmlns:a="http://schemas.openxmlformats.org/drawingml/2006/main" w="0">
+          <a:prstGeom prst="rect">
+            <a:avLst/>
+          </a:prstGeom>
+          <a:noFill/>
+          <a:ln w="0">
             <a:noFill/>
             <a:prstDash val="solid"/>
           </a:ln>
         </p:spPr>
         <p:txBody>
-          <a:bodyPr xmlns:a="http://schemas.openxmlformats.org/drawingml/2006/main"/>
-          <a:lstStyle xmlns:a="http://schemas.openxmlformats.org/drawingml/2006/main"/>
-          <a:p xmlns:a="http://schemas.openxmlformats.org/drawingml/2006/main">
+          <a:bodyPr/>
+          <a:lstStyle/>
+          <a:p>
             <a:pPr algn="l">
               <a:defRPr sz="1200" b="0">
                 <a:solidFill>
@@ -2801,35 +2520,35 @@
       <p:sp>
         <p:nvSpPr>
           <p:cNvPr id="37" name="brief-item-2">
-            <a:extLst xmlns:a="http://schemas.openxmlformats.org/drawingml/2006/main">
-              <a:ext uri="{FF2B5EF4-FFF2-40B4-BE49-F238E27FC236}">
-                <a16:creationId xmlns:a16="http://schemas.microsoft.com/office/drawing/2014/main" id="{89419B57-F613-419B-9936-5F5E475498C6}"/>
-              </a:ext>
-            </a:extLst>
-          </p:cNvPr>
-          <p:cNvSpPr>
-            <a:spLocks xmlns:a="http://schemas.openxmlformats.org/drawingml/2006/main" noGrp="1"/>
-          </p:cNvSpPr>
-          <p:nvPr/>
-        </p:nvSpPr>
-        <p:spPr>
-          <a:xfrm xmlns:a="http://schemas.openxmlformats.org/drawingml/2006/main">
+            <a:extLst>
+              <a:ext uri="{FF2B5EF4-FFF2-40B4-BE49-F238E27FC236}">
+                <ma14:creationId id="{89419B57-F613-419B-9936-5F5E475498C6}"/>
+              </a:ext>
+            </a:extLst>
+          </p:cNvPr>
+          <p:cNvSpPr>
+            <a:spLocks noGrp="1"/>
+          </p:cNvSpPr>
+          <p:nvPr/>
+        </p:nvSpPr>
+        <p:spPr>
+          <a:xfrm>
             <a:off x="8334375" y="7267575"/>
             <a:ext cx="6143625" cy="200025"/>
           </a:xfrm>
-          <a:prstGeom xmlns:a="http://schemas.openxmlformats.org/drawingml/2006/main" prst="rect">
-            <a:avLst/>
-          </a:prstGeom>
-          <a:noFill xmlns:a="http://schemas.openxmlformats.org/drawingml/2006/main"/>
-          <a:ln xmlns:a="http://schemas.openxmlformats.org/drawingml/2006/main" w="0">
+          <a:prstGeom prst="rect">
+            <a:avLst/>
+          </a:prstGeom>
+          <a:noFill/>
+          <a:ln w="0">
             <a:noFill/>
             <a:prstDash val="solid"/>
           </a:ln>
         </p:spPr>
         <p:txBody>
-          <a:bodyPr xmlns:a="http://schemas.openxmlformats.org/drawingml/2006/main"/>
-          <a:lstStyle xmlns:a="http://schemas.openxmlformats.org/drawingml/2006/main"/>
-          <a:p xmlns:a="http://schemas.openxmlformats.org/drawingml/2006/main">
+          <a:bodyPr/>
+          <a:lstStyle/>
+          <a:p>
             <a:pPr algn="l">
               <a:defRPr sz="1200" b="0">
                 <a:solidFill>
@@ -2851,35 +2570,35 @@
       <p:sp>
         <p:nvSpPr>
           <p:cNvPr id="38" name="brief-item-3">
-            <a:extLst xmlns:a="http://schemas.openxmlformats.org/drawingml/2006/main">
-              <a:ext uri="{FF2B5EF4-FFF2-40B4-BE49-F238E27FC236}">
-                <a16:creationId xmlns:a16="http://schemas.microsoft.com/office/drawing/2014/main" id="{541613F4-D73D-49EA-905A-C937A564B748}"/>
-              </a:ext>
-            </a:extLst>
-          </p:cNvPr>
-          <p:cNvSpPr>
-            <a:spLocks xmlns:a="http://schemas.openxmlformats.org/drawingml/2006/main" noGrp="1"/>
-          </p:cNvSpPr>
-          <p:nvPr/>
-        </p:nvSpPr>
-        <p:spPr>
-          <a:xfrm xmlns:a="http://schemas.openxmlformats.org/drawingml/2006/main">
+            <a:extLst>
+              <a:ext uri="{FF2B5EF4-FFF2-40B4-BE49-F238E27FC236}">
+                <ma14:creationId id="{541613F4-D73D-49EA-905A-C937A564B748}"/>
+              </a:ext>
+            </a:extLst>
+          </p:cNvPr>
+          <p:cNvSpPr>
+            <a:spLocks noGrp="1"/>
+          </p:cNvSpPr>
+          <p:nvPr/>
+        </p:nvSpPr>
+        <p:spPr>
+          <a:xfrm>
             <a:off x="8334375" y="7467600"/>
             <a:ext cx="6143625" cy="361950"/>
           </a:xfrm>
-          <a:prstGeom xmlns:a="http://schemas.openxmlformats.org/drawingml/2006/main" prst="rect">
-            <a:avLst/>
-          </a:prstGeom>
-          <a:noFill xmlns:a="http://schemas.openxmlformats.org/drawingml/2006/main"/>
-          <a:ln xmlns:a="http://schemas.openxmlformats.org/drawingml/2006/main" w="0">
+          <a:prstGeom prst="rect">
+            <a:avLst/>
+          </a:prstGeom>
+          <a:noFill/>
+          <a:ln w="0">
             <a:noFill/>
             <a:prstDash val="solid"/>
           </a:ln>
         </p:spPr>
         <p:txBody>
-          <a:bodyPr xmlns:a="http://schemas.openxmlformats.org/drawingml/2006/main"/>
-          <a:lstStyle xmlns:a="http://schemas.openxmlformats.org/drawingml/2006/main"/>
-          <a:p xmlns:a="http://schemas.openxmlformats.org/drawingml/2006/main">
+          <a:bodyPr/>
+          <a:lstStyle/>
+          <a:p>
             <a:pPr algn="l">
               <a:defRPr sz="1200" b="0">
                 <a:solidFill>
@@ -2901,35 +2620,35 @@
       <p:sp>
         <p:nvSpPr>
           <p:cNvPr id="39" name="brief-item-4">
-            <a:extLst xmlns:a="http://schemas.openxmlformats.org/drawingml/2006/main">
-              <a:ext uri="{FF2B5EF4-FFF2-40B4-BE49-F238E27FC236}">
-                <a16:creationId xmlns:a16="http://schemas.microsoft.com/office/drawing/2014/main" id="{F92F00F2-B48C-4C4A-9AF1-2D58398CB386}"/>
-              </a:ext>
-            </a:extLst>
-          </p:cNvPr>
-          <p:cNvSpPr>
-            <a:spLocks xmlns:a="http://schemas.openxmlformats.org/drawingml/2006/main" noGrp="1"/>
-          </p:cNvSpPr>
-          <p:nvPr/>
-        </p:nvSpPr>
-        <p:spPr>
-          <a:xfrm xmlns:a="http://schemas.openxmlformats.org/drawingml/2006/main">
+            <a:extLst>
+              <a:ext uri="{FF2B5EF4-FFF2-40B4-BE49-F238E27FC236}">
+                <ma14:creationId id="{F92F00F2-B48C-4C4A-9AF1-2D58398CB386}"/>
+              </a:ext>
+            </a:extLst>
+          </p:cNvPr>
+          <p:cNvSpPr>
+            <a:spLocks noGrp="1"/>
+          </p:cNvSpPr>
+          <p:nvPr/>
+        </p:nvSpPr>
+        <p:spPr>
+          <a:xfrm>
             <a:off x="8334375" y="7829550"/>
             <a:ext cx="6143625" cy="200025"/>
           </a:xfrm>
-          <a:prstGeom xmlns:a="http://schemas.openxmlformats.org/drawingml/2006/main" prst="rect">
-            <a:avLst/>
-          </a:prstGeom>
-          <a:noFill xmlns:a="http://schemas.openxmlformats.org/drawingml/2006/main"/>
-          <a:ln xmlns:a="http://schemas.openxmlformats.org/drawingml/2006/main" w="0">
+          <a:prstGeom prst="rect">
+            <a:avLst/>
+          </a:prstGeom>
+          <a:noFill/>
+          <a:ln w="0">
             <a:noFill/>
             <a:prstDash val="solid"/>
           </a:ln>
         </p:spPr>
         <p:txBody>
-          <a:bodyPr xmlns:a="http://schemas.openxmlformats.org/drawingml/2006/main"/>
-          <a:lstStyle xmlns:a="http://schemas.openxmlformats.org/drawingml/2006/main"/>
-          <a:p xmlns:a="http://schemas.openxmlformats.org/drawingml/2006/main">
+          <a:bodyPr/>
+          <a:lstStyle/>
+          <a:p>
             <a:pPr algn="l">
               <a:defRPr sz="1200" b="0">
                 <a:solidFill>
@@ -2951,35 +2670,35 @@
       <p:sp>
         <p:nvSpPr>
           <p:cNvPr id="40" name="brief-item-5">
-            <a:extLst xmlns:a="http://schemas.openxmlformats.org/drawingml/2006/main">
-              <a:ext uri="{FF2B5EF4-FFF2-40B4-BE49-F238E27FC236}">
-                <a16:creationId xmlns:a16="http://schemas.microsoft.com/office/drawing/2014/main" id="{65207A74-7247-4067-92EC-FF1656AD8C19}"/>
-              </a:ext>
-            </a:extLst>
-          </p:cNvPr>
-          <p:cNvSpPr>
-            <a:spLocks xmlns:a="http://schemas.openxmlformats.org/drawingml/2006/main" noGrp="1"/>
-          </p:cNvSpPr>
-          <p:nvPr/>
-        </p:nvSpPr>
-        <p:spPr>
-          <a:xfrm xmlns:a="http://schemas.openxmlformats.org/drawingml/2006/main">
+            <a:extLst>
+              <a:ext uri="{FF2B5EF4-FFF2-40B4-BE49-F238E27FC236}">
+                <ma14:creationId id="{65207A74-7247-4067-92EC-FF1656AD8C19}"/>
+              </a:ext>
+            </a:extLst>
+          </p:cNvPr>
+          <p:cNvSpPr>
+            <a:spLocks noGrp="1"/>
+          </p:cNvSpPr>
+          <p:nvPr/>
+        </p:nvSpPr>
+        <p:spPr>
+          <a:xfrm>
             <a:off x="8334375" y="8029575"/>
             <a:ext cx="6143625" cy="200025"/>
           </a:xfrm>
-          <a:prstGeom xmlns:a="http://schemas.openxmlformats.org/drawingml/2006/main" prst="rect">
-            <a:avLst/>
-          </a:prstGeom>
-          <a:noFill xmlns:a="http://schemas.openxmlformats.org/drawingml/2006/main"/>
-          <a:ln xmlns:a="http://schemas.openxmlformats.org/drawingml/2006/main" w="0">
+          <a:prstGeom prst="rect">
+            <a:avLst/>
+          </a:prstGeom>
+          <a:noFill/>
+          <a:ln w="0">
             <a:noFill/>
             <a:prstDash val="solid"/>
           </a:ln>
         </p:spPr>
         <p:txBody>
-          <a:bodyPr xmlns:a="http://schemas.openxmlformats.org/drawingml/2006/main"/>
-          <a:lstStyle xmlns:a="http://schemas.openxmlformats.org/drawingml/2006/main"/>
-          <a:p xmlns:a="http://schemas.openxmlformats.org/drawingml/2006/main">
+          <a:bodyPr/>
+          <a:lstStyle/>
+          <a:p>
             <a:pPr algn="l">
               <a:defRPr sz="1200" b="0">
                 <a:solidFill>
@@ -3001,35 +2720,35 @@
       <p:sp>
         <p:nvSpPr>
           <p:cNvPr id="41" name="footer-source">
-            <a:extLst xmlns:a="http://schemas.openxmlformats.org/drawingml/2006/main">
-              <a:ext uri="{FF2B5EF4-FFF2-40B4-BE49-F238E27FC236}">
-                <a16:creationId xmlns:a16="http://schemas.microsoft.com/office/drawing/2014/main" id="{27DEA7E4-E67E-44DF-918F-E24922A2808E}"/>
-              </a:ext>
-            </a:extLst>
-          </p:cNvPr>
-          <p:cNvSpPr>
-            <a:spLocks xmlns:a="http://schemas.openxmlformats.org/drawingml/2006/main" noGrp="1"/>
-          </p:cNvSpPr>
-          <p:nvPr/>
-        </p:nvSpPr>
-        <p:spPr>
-          <a:xfrm xmlns:a="http://schemas.openxmlformats.org/drawingml/2006/main">
+            <a:extLst>
+              <a:ext uri="{FF2B5EF4-FFF2-40B4-BE49-F238E27FC236}">
+                <ma14:creationId id="{27DEA7E4-E67E-44DF-918F-E24922A2808E}"/>
+              </a:ext>
+            </a:extLst>
+          </p:cNvPr>
+          <p:cNvSpPr>
+            <a:spLocks noGrp="1"/>
+          </p:cNvSpPr>
+          <p:nvPr/>
+        </p:nvSpPr>
+        <p:spPr>
+          <a:xfrm>
             <a:off x="495300" y="8324850"/>
             <a:ext cx="7620000" cy="190500"/>
           </a:xfrm>
-          <a:prstGeom xmlns:a="http://schemas.openxmlformats.org/drawingml/2006/main" prst="rect">
-            <a:avLst/>
-          </a:prstGeom>
-          <a:noFill xmlns:a="http://schemas.openxmlformats.org/drawingml/2006/main"/>
-          <a:ln xmlns:a="http://schemas.openxmlformats.org/drawingml/2006/main" w="0">
+          <a:prstGeom prst="rect">
+            <a:avLst/>
+          </a:prstGeom>
+          <a:noFill/>
+          <a:ln w="0">
             <a:noFill/>
             <a:prstDash val="solid"/>
           </a:ln>
         </p:spPr>
         <p:txBody>
-          <a:bodyPr xmlns:a="http://schemas.openxmlformats.org/drawingml/2006/main"/>
-          <a:lstStyle xmlns:a="http://schemas.openxmlformats.org/drawingml/2006/main"/>
-          <a:p xmlns:a="http://schemas.openxmlformats.org/drawingml/2006/main">
+          <a:bodyPr/>
+          <a:lstStyle/>
+          <a:p>
             <a:pPr algn="l">
               <a:defRPr sz="1200" b="0">
                 <a:solidFill>
@@ -3051,35 +2770,35 @@
       <p:sp>
         <p:nvSpPr>
           <p:cNvPr id="42" name="footer-team">
-            <a:extLst xmlns:a="http://schemas.openxmlformats.org/drawingml/2006/main">
-              <a:ext uri="{FF2B5EF4-FFF2-40B4-BE49-F238E27FC236}">
-                <a16:creationId xmlns:a16="http://schemas.microsoft.com/office/drawing/2014/main" id="{18262459-389B-4187-ACB9-6D50A32D75BF}"/>
-              </a:ext>
-            </a:extLst>
-          </p:cNvPr>
-          <p:cNvSpPr>
-            <a:spLocks xmlns:a="http://schemas.openxmlformats.org/drawingml/2006/main" noGrp="1"/>
-          </p:cNvSpPr>
-          <p:nvPr/>
-        </p:nvSpPr>
-        <p:spPr>
-          <a:xfrm xmlns:a="http://schemas.openxmlformats.org/drawingml/2006/main">
+            <a:extLst>
+              <a:ext uri="{FF2B5EF4-FFF2-40B4-BE49-F238E27FC236}">
+                <ma14:creationId id="{18262459-389B-4187-ACB9-6D50A32D75BF}"/>
+              </a:ext>
+            </a:extLst>
+          </p:cNvPr>
+          <p:cNvSpPr>
+            <a:spLocks noGrp="1"/>
+          </p:cNvSpPr>
+          <p:nvPr/>
+        </p:nvSpPr>
+        <p:spPr>
+          <a:xfrm>
             <a:off x="12573000" y="8324850"/>
             <a:ext cx="2190750" cy="190500"/>
           </a:xfrm>
-          <a:prstGeom xmlns:a="http://schemas.openxmlformats.org/drawingml/2006/main" prst="rect">
-            <a:avLst/>
-          </a:prstGeom>
-          <a:noFill xmlns:a="http://schemas.openxmlformats.org/drawingml/2006/main"/>
-          <a:ln xmlns:a="http://schemas.openxmlformats.org/drawingml/2006/main" w="0">
+          <a:prstGeom prst="rect">
+            <a:avLst/>
+          </a:prstGeom>
+          <a:noFill/>
+          <a:ln w="0">
             <a:noFill/>
             <a:prstDash val="solid"/>
           </a:ln>
         </p:spPr>
         <p:txBody>
-          <a:bodyPr xmlns:a="http://schemas.openxmlformats.org/drawingml/2006/main"/>
-          <a:lstStyle xmlns:a="http://schemas.openxmlformats.org/drawingml/2006/main"/>
-          <a:p xmlns:a="http://schemas.openxmlformats.org/drawingml/2006/main">
+          <a:bodyPr/>
+          <a:lstStyle/>
+          <a:p>
             <a:pPr algn="r">
               <a:defRPr sz="1200" b="1">
                 <a:solidFill>
@@ -3101,10 +2820,13 @@
     </p:spTree>
     <p:extLst>
       <p:ext uri="{BB962C8B-B14F-4D97-AF65-F5344CB8AC3E}">
-        <p14:creationId xmlns:p14="http://schemas.microsoft.com/office/powerpoint/2010/main" val="1463500918"/>
+        <p14:creationId val="1463500918"/>
       </p:ext>
     </p:extLst>
   </p:cSld>
+  <p:clrMapOvr>
+    <a:masterClrMapping/>
+  </p:clrMapOvr>
 </p:sld>
 </file>
 
@@ -3350,5 +3072,254 @@
       </a:bgFillStyleLst>
     </a:fmtScheme>
   </a:themeElements>
+  <a:objectDefaults/>
+  <a:extraClrSchemeLst/>
+</a:theme>
+</file>
+
+<file path=ppt/theme/theme2.xml><?xml version="1.0" encoding="utf-8"?>
+<a:theme xmlns:a="http://schemas.openxmlformats.org/drawingml/2006/main" name="ChatGPT">
+  <a:themeElements>
+    <a:clrScheme name="ChatGPT">
+      <a:dk1>
+        <a:srgbClr val="000000"/>
+      </a:dk1>
+      <a:lt1>
+        <a:srgbClr val="FFFFFF"/>
+      </a:lt1>
+      <a:dk2>
+        <a:srgbClr val="0E2841"/>
+      </a:dk2>
+      <a:lt2>
+        <a:srgbClr val="E8E8E8"/>
+      </a:lt2>
+      <a:accent1>
+        <a:srgbClr val="156082"/>
+      </a:accent1>
+      <a:accent2>
+        <a:srgbClr val="E97132"/>
+      </a:accent2>
+      <a:accent3>
+        <a:srgbClr val="196B24"/>
+      </a:accent3>
+      <a:accent4>
+        <a:srgbClr val="0F9ED5"/>
+      </a:accent4>
+      <a:accent5>
+        <a:srgbClr val="A02B93"/>
+      </a:accent5>
+      <a:accent6>
+        <a:srgbClr val="4EA72E"/>
+      </a:accent6>
+      <a:hlink>
+        <a:srgbClr val="467886"/>
+      </a:hlink>
+      <a:folHlink>
+        <a:srgbClr val="96607D"/>
+      </a:folHlink>
+    </a:clrScheme>
+    <a:fontScheme name="Office">
+      <a:majorFont>
+        <a:latin typeface="Calibri Light"/>
+        <a:ea typeface="Calibri Light"/>
+        <a:cs typeface="Calibri Light"/>
+      </a:majorFont>
+      <a:minorFont>
+        <a:latin typeface="Calibri"/>
+        <a:ea typeface="Calibri"/>
+        <a:cs typeface="Calibri"/>
+      </a:minorFont>
+    </a:fontScheme>
+    <a:fmtScheme name="ChatGPT">
+      <a:fillStyleLst>
+        <a:solidFill>
+          <a:schemeClr val="phClr"/>
+        </a:solidFill>
+        <a:gradFill>
+          <a:gsLst>
+            <a:gs pos="0">
+              <a:schemeClr val="phClr">
+                <a:tint val="67000"/>
+                <a:lumMod val="110000"/>
+                <a:satMod val="105000"/>
+              </a:schemeClr>
+            </a:gs>
+            <a:gs pos="50000">
+              <a:schemeClr val="phClr">
+                <a:tint val="73000"/>
+                <a:lumMod val="105000"/>
+                <a:satMod val="103000"/>
+              </a:schemeClr>
+            </a:gs>
+            <a:gs pos="100000">
+              <a:schemeClr val="phClr">
+                <a:tint val="81000"/>
+                <a:lumMod val="105000"/>
+                <a:satMod val="109000"/>
+              </a:schemeClr>
+            </a:gs>
+          </a:gsLst>
+          <a:lin ang="5400000" scaled="0"/>
+        </a:gradFill>
+        <a:gradFill>
+          <a:gsLst>
+            <a:gs pos="0">
+              <a:schemeClr val="phClr">
+                <a:tint val="94000"/>
+                <a:lumMod val="102000"/>
+                <a:satMod val="103000"/>
+              </a:schemeClr>
+            </a:gs>
+            <a:gs pos="50000">
+              <a:schemeClr val="phClr">
+                <a:shade val="100000"/>
+                <a:lumMod val="100000"/>
+                <a:satMod val="110000"/>
+              </a:schemeClr>
+            </a:gs>
+            <a:gs pos="100000">
+              <a:schemeClr val="phClr">
+                <a:shade val="78000"/>
+                <a:lumMod val="99000"/>
+                <a:satMod val="120000"/>
+              </a:schemeClr>
+            </a:gs>
+          </a:gsLst>
+          <a:lin ang="5400000" scaled="0"/>
+        </a:gradFill>
+      </a:fillStyleLst>
+      <a:lnStyleLst>
+        <a:ln w="12700">
+          <a:solidFill>
+            <a:schemeClr val="phClr"/>
+          </a:solidFill>
+          <a:prstDash val="solid"/>
+        </a:ln>
+        <a:ln w="19050">
+          <a:solidFill>
+            <a:schemeClr val="phClr"/>
+          </a:solidFill>
+          <a:prstDash val="solid"/>
+        </a:ln>
+        <a:ln w="25400">
+          <a:solidFill>
+            <a:schemeClr val="phClr"/>
+          </a:solidFill>
+          <a:prstDash val="solid"/>
+        </a:ln>
+      </a:lnStyleLst>
+      <a:effectStyleLst>
+        <a:effectStyle>
+          <a:effectLst/>
+        </a:effectStyle>
+        <a:effectStyle>
+          <a:effectLst/>
+        </a:effectStyle>
+        <a:effectStyle>
+          <a:effectLst>
+            <a:outerShdw blurRad="57150" dist="19050" dir="5400000">
+              <a:srgbClr val="000000">
+                <a:alpha val="16000"/>
+              </a:srgbClr>
+            </a:outerShdw>
+          </a:effectLst>
+        </a:effectStyle>
+        <a:effectStyle>
+          <a:effectLst>
+            <a:outerShdw blurRad="19050" dist="9525" dir="5400000">
+              <a:srgbClr val="000000">
+                <a:alpha val="6000"/>
+              </a:srgbClr>
+            </a:outerShdw>
+          </a:effectLst>
+        </a:effectStyle>
+        <a:effectStyle>
+          <a:effectLst>
+            <a:outerShdw blurRad="28575" dist="9525" dir="5400000">
+              <a:srgbClr val="000000">
+                <a:alpha val="8000"/>
+              </a:srgbClr>
+            </a:outerShdw>
+          </a:effectLst>
+        </a:effectStyle>
+        <a:effectStyle>
+          <a:effectLst>
+            <a:outerShdw blurRad="57150" dist="19050" dir="5400000">
+              <a:srgbClr val="000000">
+                <a:alpha val="10000"/>
+              </a:srgbClr>
+            </a:outerShdw>
+          </a:effectLst>
+        </a:effectStyle>
+        <a:effectStyle>
+          <a:effectLst>
+            <a:outerShdw blurRad="114300" dist="38100" dir="5400000">
+              <a:srgbClr val="000000">
+                <a:alpha val="12000"/>
+              </a:srgbClr>
+            </a:outerShdw>
+          </a:effectLst>
+        </a:effectStyle>
+        <a:effectStyle>
+          <a:effectLst>
+            <a:outerShdw blurRad="171450" dist="57150" dir="5400000">
+              <a:srgbClr val="000000">
+                <a:alpha val="16000"/>
+              </a:srgbClr>
+            </a:outerShdw>
+          </a:effectLst>
+        </a:effectStyle>
+        <a:effectStyle>
+          <a:effectLst>
+            <a:outerShdw blurRad="266700" dist="95250" dir="5400000">
+              <a:srgbClr val="000000">
+                <a:alpha val="24000"/>
+              </a:srgbClr>
+            </a:outerShdw>
+          </a:effectLst>
+        </a:effectStyle>
+      </a:effectStyleLst>
+      <a:bgFillStyleLst>
+        <a:solidFill>
+          <a:schemeClr val="phClr"/>
+        </a:solidFill>
+        <a:solidFill>
+          <a:schemeClr val="phClr">
+            <a:tint val="95000"/>
+            <a:satMod val="170000"/>
+          </a:schemeClr>
+        </a:solidFill>
+        <a:gradFill>
+          <a:gsLst>
+            <a:gs pos="0">
+              <a:schemeClr val="phClr">
+                <a:tint val="93000"/>
+                <a:shade val="98000"/>
+                <a:lumMod val="102000"/>
+                <a:satMod val="150000"/>
+              </a:schemeClr>
+            </a:gs>
+            <a:gs pos="50000">
+              <a:schemeClr val="phClr">
+                <a:tint val="98000"/>
+                <a:shade val="90000"/>
+                <a:lumMod val="103000"/>
+                <a:satMod val="130000"/>
+              </a:schemeClr>
+            </a:gs>
+            <a:gs pos="100000">
+              <a:schemeClr val="phClr">
+                <a:shade val="63000"/>
+                <a:satMod val="120000"/>
+              </a:schemeClr>
+            </a:gs>
+          </a:gsLst>
+          <a:lin ang="5400000" scaled="0"/>
+        </a:gradFill>
+      </a:bgFillStyleLst>
+    </a:fmtScheme>
+  </a:themeElements>
+  <a:objectDefaults/>
+  <a:extraClrSchemeLst/>
 </a:theme>
 </file>
--- a/SlateBlue_Information_Visualization_Poster.pptx
+++ b/SlateBlue_Information_Visualization_Poster.pptx
@@ -107,6 +107,11 @@
       </a:defRPr>
     </a:lvl9pPr>
   </p:defaultTextStyle>
+  <p:extLst>
+    <p:ext uri="{EFAFB233-063F-42B5-8137-9DF3F51BA10A}">
+      <p15:sldGuideLst xmlns:p15="http://schemas.microsoft.com/office/powerpoint/2012/main"/>
+    </p:ext>
+  </p:extLst>
 </p:presentation>
 </file>
 
@@ -722,7 +727,7 @@
 </file>
 
 <file path=ppt/slides/slide1.xml><?xml version="1.0" encoding="utf-8"?>
-<p:sld xmlns:a="http://schemas.openxmlformats.org/drawingml/2006/main" xmlns:ma14="http://schemas.microsoft.com/office/drawing/2014/main" xmlns:p="http://schemas.openxmlformats.org/presentationml/2006/main" xmlns:p14="http://schemas.microsoft.com/office/powerpoint/2010/main" xmlns:r="http://schemas.openxmlformats.org/officeDocument/2006/relationships">
+<p:sld xmlns:a="http://schemas.openxmlformats.org/drawingml/2006/main" xmlns:r="http://schemas.openxmlformats.org/officeDocument/2006/relationships" xmlns:p="http://schemas.openxmlformats.org/presentationml/2006/main">
   <p:cSld>
     <p:bg>
       <p:bgPr>
@@ -751,7 +756,7 @@
           <p:cNvPr id="43" name="poster-eyebrow">
             <a:extLst>
               <a:ext uri="{FF2B5EF4-FFF2-40B4-BE49-F238E27FC236}">
-                <ma14:creationId id="{E08A73F4-AF3B-4FB9-9199-6E75EBE57C78}"/>
+                <a16:creationId xmlns:a16="http://schemas.microsoft.com/office/drawing/2014/main" id="{E08A73F4-AF3B-4FB9-9199-6E75EBE57C78}"/>
               </a:ext>
             </a:extLst>
           </p:cNvPr>
@@ -801,7 +806,7 @@
           <p:cNvPr id="2" name="poster-title">
             <a:extLst>
               <a:ext uri="{FF2B5EF4-FFF2-40B4-BE49-F238E27FC236}">
-                <ma14:creationId id="{E8B61170-807C-41C5-A9C3-D1CB68BCC6F7}"/>
+                <a16:creationId xmlns:a16="http://schemas.microsoft.com/office/drawing/2014/main" id="{E8B61170-807C-41C5-A9C3-D1CB68BCC6F7}"/>
               </a:ext>
             </a:extLst>
           </p:cNvPr>
@@ -851,7 +856,7 @@
           <p:cNvPr id="3" name="poster-subtitle">
             <a:extLst>
               <a:ext uri="{FF2B5EF4-FFF2-40B4-BE49-F238E27FC236}">
-                <ma14:creationId id="{2A870308-500A-4C5D-8D3A-3876E006D13F}"/>
+                <a16:creationId xmlns:a16="http://schemas.microsoft.com/office/drawing/2014/main" id="{2A870308-500A-4C5D-8D3A-3876E006D13F}"/>
               </a:ext>
             </a:extLst>
           </p:cNvPr>
@@ -901,7 +906,7 @@
           <p:cNvPr id="4" name="course-label">
             <a:extLst>
               <a:ext uri="{FF2B5EF4-FFF2-40B4-BE49-F238E27FC236}">
-                <ma14:creationId id="{090F4A22-E112-478E-A19E-78AB5EA8286A}"/>
+                <a16:creationId xmlns:a16="http://schemas.microsoft.com/office/drawing/2014/main" id="{090F4A22-E112-478E-A19E-78AB5EA8286A}"/>
               </a:ext>
             </a:extLst>
           </p:cNvPr>
@@ -970,7 +975,7 @@
           <p:cNvPr id="5" name="header-rule">
             <a:extLst>
               <a:ext uri="{FF2B5EF4-FFF2-40B4-BE49-F238E27FC236}">
-                <ma14:creationId id="{4721218B-854A-49AE-BF77-AC9B17BD412F}"/>
+                <a16:creationId xmlns:a16="http://schemas.microsoft.com/office/drawing/2014/main" id="{4721218B-854A-49AE-BF77-AC9B17BD412F}"/>
               </a:ext>
             </a:extLst>
           </p:cNvPr>
@@ -1008,7 +1013,7 @@
           <p:cNvPr id="6" name="original-heading">
             <a:extLst>
               <a:ext uri="{FF2B5EF4-FFF2-40B4-BE49-F238E27FC236}">
-                <ma14:creationId id="{D7845612-A309-4213-A447-45EE0BDEA4E4}"/>
+                <a16:creationId xmlns:a16="http://schemas.microsoft.com/office/drawing/2014/main" id="{D7845612-A309-4213-A447-45EE0BDEA4E4}"/>
               </a:ext>
             </a:extLst>
           </p:cNvPr>
@@ -1058,7 +1063,7 @@
           <p:cNvPr id="7" name="original-image-frame">
             <a:extLst>
               <a:ext uri="{FF2B5EF4-FFF2-40B4-BE49-F238E27FC236}">
-                <ma14:creationId id="{9868A52F-0F2B-4F93-B202-28AFDC7E515D}"/>
+                <a16:creationId xmlns:a16="http://schemas.microsoft.com/office/drawing/2014/main" id="{9868A52F-0F2B-4F93-B202-28AFDC7E515D}"/>
               </a:ext>
             </a:extLst>
           </p:cNvPr>
@@ -1122,7 +1127,7 @@
           <p:cNvPr id="9" name="original-credit">
             <a:extLst>
               <a:ext uri="{FF2B5EF4-FFF2-40B4-BE49-F238E27FC236}">
-                <ma14:creationId id="{6C8419D4-7B52-40D4-A637-322E2D4DACB8}"/>
+                <a16:creationId xmlns:a16="http://schemas.microsoft.com/office/drawing/2014/main" id="{6C8419D4-7B52-40D4-A637-322E2D4DACB8}"/>
               </a:ext>
             </a:extLst>
           </p:cNvPr>
@@ -1189,7 +1194,7 @@
           <p:cNvPr id="10" name="left-divider">
             <a:extLst>
               <a:ext uri="{FF2B5EF4-FFF2-40B4-BE49-F238E27FC236}">
-                <ma14:creationId id="{84BA1672-618F-4A5D-AA17-2AD159FA8C07}"/>
+                <a16:creationId xmlns:a16="http://schemas.microsoft.com/office/drawing/2014/main" id="{84BA1672-618F-4A5D-AA17-2AD159FA8C07}"/>
               </a:ext>
             </a:extLst>
           </p:cNvPr>
@@ -1227,7 +1232,7 @@
           <p:cNvPr id="11" name="critique-heading">
             <a:extLst>
               <a:ext uri="{FF2B5EF4-FFF2-40B4-BE49-F238E27FC236}">
-                <ma14:creationId id="{2C358AD1-F061-41A0-A616-AD9065AED82B}"/>
+                <a16:creationId xmlns:a16="http://schemas.microsoft.com/office/drawing/2014/main" id="{2C358AD1-F061-41A0-A616-AD9065AED82B}"/>
               </a:ext>
             </a:extLst>
           </p:cNvPr>
@@ -1277,7 +1282,7 @@
           <p:cNvPr id="12" name="critique-item-1">
             <a:extLst>
               <a:ext uri="{FF2B5EF4-FFF2-40B4-BE49-F238E27FC236}">
-                <ma14:creationId id="{54BEEE7E-810E-4B36-B263-15F8038FB857}"/>
+                <a16:creationId xmlns:a16="http://schemas.microsoft.com/office/drawing/2014/main" id="{54BEEE7E-810E-4B36-B263-15F8038FB857}"/>
               </a:ext>
             </a:extLst>
           </p:cNvPr>
@@ -1327,7 +1332,7 @@
           <p:cNvPr id="13" name="critique-item-2">
             <a:extLst>
               <a:ext uri="{FF2B5EF4-FFF2-40B4-BE49-F238E27FC236}">
-                <ma14:creationId id="{28654507-EED0-43F0-9D5A-6768F6B9DFFC}"/>
+                <a16:creationId xmlns:a16="http://schemas.microsoft.com/office/drawing/2014/main" id="{28654507-EED0-43F0-9D5A-6768F6B9DFFC}"/>
               </a:ext>
             </a:extLst>
           </p:cNvPr>
@@ -1377,7 +1382,7 @@
           <p:cNvPr id="14" name="critique-item-3">
             <a:extLst>
               <a:ext uri="{FF2B5EF4-FFF2-40B4-BE49-F238E27FC236}">
-                <ma14:creationId id="{A8E35460-0C76-49E7-8113-054A4DD2459D}"/>
+                <a16:creationId xmlns:a16="http://schemas.microsoft.com/office/drawing/2014/main" id="{A8E35460-0C76-49E7-8113-054A4DD2459D}"/>
               </a:ext>
             </a:extLst>
           </p:cNvPr>
@@ -1427,7 +1432,7 @@
           <p:cNvPr id="15" name="critique-item-4">
             <a:extLst>
               <a:ext uri="{FF2B5EF4-FFF2-40B4-BE49-F238E27FC236}">
-                <ma14:creationId id="{FF747383-EB2D-4FE0-B3C8-9F0265A7AC62}"/>
+                <a16:creationId xmlns:a16="http://schemas.microsoft.com/office/drawing/2014/main" id="{FF747383-EB2D-4FE0-B3C8-9F0265A7AC62}"/>
               </a:ext>
             </a:extLst>
           </p:cNvPr>
@@ -1477,7 +1482,7 @@
           <p:cNvPr id="16" name="improved-heading">
             <a:extLst>
               <a:ext uri="{FF2B5EF4-FFF2-40B4-BE49-F238E27FC236}">
-                <ma14:creationId id="{028ADC3E-E420-4598-8203-105158713BE6}"/>
+                <a16:creationId xmlns:a16="http://schemas.microsoft.com/office/drawing/2014/main" id="{028ADC3E-E420-4598-8203-105158713BE6}"/>
               </a:ext>
             </a:extLst>
           </p:cNvPr>
@@ -1527,7 +1532,7 @@
           <p:cNvPr id="17" name="improved-image-frame">
             <a:extLst>
               <a:ext uri="{FF2B5EF4-FFF2-40B4-BE49-F238E27FC236}">
-                <ma14:creationId id="{90F028F8-7D50-4E87-ACB1-2203FBCFAE86}"/>
+                <a16:creationId xmlns:a16="http://schemas.microsoft.com/office/drawing/2014/main" id="{90F028F8-7D50-4E87-ACB1-2203FBCFAE86}"/>
               </a:ext>
             </a:extLst>
           </p:cNvPr>
@@ -1564,37 +1569,12 @@
           </a:p>
         </p:txBody>
       </p:sp>
-      <p:pic>
-        <p:nvPicPr>
-          <p:cNvPr id="60" name="Picture 59"/>
-          <p:cNvPicPr>
-            <a:picLocks noChangeAspect="1"/>
-          </p:cNvPicPr>
-          <p:nvPr/>
-        </p:nvPicPr>
-        <p:blipFill>
-          <a:blip r:embed="rId4"/>
-          <a:srcRect l="9888" t="9818" r="7845" b="6358"/>
-          <a:stretch>
-            <a:fillRect/>
-          </a:stretch>
-        </p:blipFill>
-        <p:spPr>
-          <a:xfrm>
-            <a:off x="5087360" y="1886733"/>
-            <a:ext cx="6494029" cy="4676014"/>
-          </a:xfrm>
-          <a:prstGeom prst="rect">
-            <a:avLst/>
-          </a:prstGeom>
-        </p:spPr>
-      </p:pic>
       <p:sp>
         <p:nvSpPr>
           <p:cNvPr id="19" name="right-context-surface">
             <a:extLst>
               <a:ext uri="{FF2B5EF4-FFF2-40B4-BE49-F238E27FC236}">
-                <ma14:creationId id="{84E17126-4A42-4FF3-9F8E-2722F6467CF0}"/>
+                <a16:creationId xmlns:a16="http://schemas.microsoft.com/office/drawing/2014/main" id="{84E17126-4A42-4FF3-9F8E-2722F6467CF0}"/>
               </a:ext>
             </a:extLst>
           </p:cNvPr>
@@ -1636,7 +1616,7 @@
           <p:cNvPr id="20" name="redesign-heading">
             <a:extLst>
               <a:ext uri="{FF2B5EF4-FFF2-40B4-BE49-F238E27FC236}">
-                <ma14:creationId id="{74F50EA3-E7A0-43C9-9346-B545829B9925}"/>
+                <a16:creationId xmlns:a16="http://schemas.microsoft.com/office/drawing/2014/main" id="{74F50EA3-E7A0-43C9-9346-B545829B9925}"/>
               </a:ext>
             </a:extLst>
           </p:cNvPr>
@@ -1686,7 +1666,7 @@
           <p:cNvPr id="21" name="redesign-item-1">
             <a:extLst>
               <a:ext uri="{FF2B5EF4-FFF2-40B4-BE49-F238E27FC236}">
-                <ma14:creationId id="{3E3B26D5-EEF7-4CFB-A635-FD58A2003410}"/>
+                <a16:creationId xmlns:a16="http://schemas.microsoft.com/office/drawing/2014/main" id="{3E3B26D5-EEF7-4CFB-A635-FD58A2003410}"/>
               </a:ext>
             </a:extLst>
           </p:cNvPr>
@@ -1736,7 +1716,7 @@
           <p:cNvPr id="22" name="redesign-item-2">
             <a:extLst>
               <a:ext uri="{FF2B5EF4-FFF2-40B4-BE49-F238E27FC236}">
-                <ma14:creationId id="{0346C853-5271-4D29-BE11-CDB38807DAFC}"/>
+                <a16:creationId xmlns:a16="http://schemas.microsoft.com/office/drawing/2014/main" id="{0346C853-5271-4D29-BE11-CDB38807DAFC}"/>
               </a:ext>
             </a:extLst>
           </p:cNvPr>
@@ -1786,7 +1766,7 @@
           <p:cNvPr id="23" name="redesign-item-3">
             <a:extLst>
               <a:ext uri="{FF2B5EF4-FFF2-40B4-BE49-F238E27FC236}">
-                <ma14:creationId id="{AE473FA0-362D-4D9D-9BC1-FA5BE6106E52}"/>
+                <a16:creationId xmlns:a16="http://schemas.microsoft.com/office/drawing/2014/main" id="{AE473FA0-362D-4D9D-9BC1-FA5BE6106E52}"/>
               </a:ext>
             </a:extLst>
           </p:cNvPr>
@@ -1836,7 +1816,7 @@
           <p:cNvPr id="24" name="redesign-item-4">
             <a:extLst>
               <a:ext uri="{FF2B5EF4-FFF2-40B4-BE49-F238E27FC236}">
-                <ma14:creationId id="{28D55F55-6A55-4537-BB84-1B39534AB0FA}"/>
+                <a16:creationId xmlns:a16="http://schemas.microsoft.com/office/drawing/2014/main" id="{28D55F55-6A55-4537-BB84-1B39534AB0FA}"/>
               </a:ext>
             </a:extLst>
           </p:cNvPr>
@@ -1886,7 +1866,7 @@
           <p:cNvPr id="25" name="context-divider">
             <a:extLst>
               <a:ext uri="{FF2B5EF4-FFF2-40B4-BE49-F238E27FC236}">
-                <ma14:creationId id="{C9AF6790-74A4-42AD-ABAE-E4528EED11B1}"/>
+                <a16:creationId xmlns:a16="http://schemas.microsoft.com/office/drawing/2014/main" id="{C9AF6790-74A4-42AD-ABAE-E4528EED11B1}"/>
               </a:ext>
             </a:extLst>
           </p:cNvPr>
@@ -1924,7 +1904,7 @@
           <p:cNvPr id="26" name="data-heading">
             <a:extLst>
               <a:ext uri="{FF2B5EF4-FFF2-40B4-BE49-F238E27FC236}">
-                <ma14:creationId id="{F0D2B5C4-4F9C-4629-A542-02693F6A7570}"/>
+                <a16:creationId xmlns:a16="http://schemas.microsoft.com/office/drawing/2014/main" id="{F0D2B5C4-4F9C-4629-A542-02693F6A7570}"/>
               </a:ext>
             </a:extLst>
           </p:cNvPr>
@@ -1974,7 +1954,7 @@
           <p:cNvPr id="27" name="data-emissions">
             <a:extLst>
               <a:ext uri="{FF2B5EF4-FFF2-40B4-BE49-F238E27FC236}">
-                <ma14:creationId id="{8CBBB212-A1ED-468E-B4D7-1E5EDC173F83}"/>
+                <a16:creationId xmlns:a16="http://schemas.microsoft.com/office/drawing/2014/main" id="{8CBBB212-A1ED-468E-B4D7-1E5EDC173F83}"/>
               </a:ext>
             </a:extLst>
           </p:cNvPr>
@@ -2058,7 +2038,7 @@
           <p:cNvPr id="28" name="data-population">
             <a:extLst>
               <a:ext uri="{FF2B5EF4-FFF2-40B4-BE49-F238E27FC236}">
-                <ma14:creationId id="{D469E2B5-59FB-4162-A57E-AC768AA840C6}"/>
+                <a16:creationId xmlns:a16="http://schemas.microsoft.com/office/drawing/2014/main" id="{D469E2B5-59FB-4162-A57E-AC768AA840C6}"/>
               </a:ext>
             </a:extLst>
           </p:cNvPr>
@@ -2125,7 +2105,7 @@
           <p:cNvPr id="29" name="data-gdp">
             <a:extLst>
               <a:ext uri="{FF2B5EF4-FFF2-40B4-BE49-F238E27FC236}">
-                <ma14:creationId id="{84EAF8B0-BC7C-4E68-B2C3-CF36913C6F12}"/>
+                <a16:creationId xmlns:a16="http://schemas.microsoft.com/office/drawing/2014/main" id="{84EAF8B0-BC7C-4E68-B2C3-CF36913C6F12}"/>
               </a:ext>
             </a:extLst>
           </p:cNvPr>
@@ -2192,7 +2172,7 @@
           <p:cNvPr id="30" name="gdp-interpretation">
             <a:extLst>
               <a:ext uri="{FF2B5EF4-FFF2-40B4-BE49-F238E27FC236}">
-                <ma14:creationId id="{E932DB87-F094-4694-8C3C-EF781D36A277}"/>
+                <a16:creationId xmlns:a16="http://schemas.microsoft.com/office/drawing/2014/main" id="{E932DB87-F094-4694-8C3C-EF781D36A277}"/>
               </a:ext>
             </a:extLst>
           </p:cNvPr>
@@ -2242,7 +2222,7 @@
           <p:cNvPr id="31" name="design-brief-surface">
             <a:extLst>
               <a:ext uri="{FF2B5EF4-FFF2-40B4-BE49-F238E27FC236}">
-                <ma14:creationId id="{A907F6A4-85B6-4A7F-A19B-75FCE59248A6}"/>
+                <a16:creationId xmlns:a16="http://schemas.microsoft.com/office/drawing/2014/main" id="{A907F6A4-85B6-4A7F-A19B-75FCE59248A6}"/>
               </a:ext>
             </a:extLst>
           </p:cNvPr>
@@ -2284,7 +2264,7 @@
           <p:cNvPr id="32" name="design-brief-heading">
             <a:extLst>
               <a:ext uri="{FF2B5EF4-FFF2-40B4-BE49-F238E27FC236}">
-                <ma14:creationId id="{9F70041F-ADF4-40E8-A3DD-C8866294561F}"/>
+                <a16:creationId xmlns:a16="http://schemas.microsoft.com/office/drawing/2014/main" id="{9F70041F-ADF4-40E8-A3DD-C8866294561F}"/>
               </a:ext>
             </a:extLst>
           </p:cNvPr>
@@ -2334,7 +2314,7 @@
           <p:cNvPr id="33" name="design-brief-audience">
             <a:extLst>
               <a:ext uri="{FF2B5EF4-FFF2-40B4-BE49-F238E27FC236}">
-                <ma14:creationId id="{E794E44D-05BE-4606-980E-823BDBC3A37F}"/>
+                <a16:creationId xmlns:a16="http://schemas.microsoft.com/office/drawing/2014/main" id="{E794E44D-05BE-4606-980E-823BDBC3A37F}"/>
               </a:ext>
             </a:extLst>
           </p:cNvPr>
@@ -2384,7 +2364,7 @@
           <p:cNvPr id="34" name="brief-column-divider">
             <a:extLst>
               <a:ext uri="{FF2B5EF4-FFF2-40B4-BE49-F238E27FC236}">
-                <ma14:creationId id="{DA79E8F1-A9D2-4647-8A45-4910A0E588B5}"/>
+                <a16:creationId xmlns:a16="http://schemas.microsoft.com/office/drawing/2014/main" id="{DA79E8F1-A9D2-4647-8A45-4910A0E588B5}"/>
               </a:ext>
             </a:extLst>
           </p:cNvPr>
@@ -2422,7 +2402,7 @@
           <p:cNvPr id="35" name="main-revisions-heading">
             <a:extLst>
               <a:ext uri="{FF2B5EF4-FFF2-40B4-BE49-F238E27FC236}">
-                <ma14:creationId id="{BE55EB57-41FB-4943-AFE3-5585C6BA7B2F}"/>
+                <a16:creationId xmlns:a16="http://schemas.microsoft.com/office/drawing/2014/main" id="{BE55EB57-41FB-4943-AFE3-5585C6BA7B2F}"/>
               </a:ext>
             </a:extLst>
           </p:cNvPr>
@@ -2472,7 +2452,7 @@
           <p:cNvPr id="36" name="brief-item-1">
             <a:extLst>
               <a:ext uri="{FF2B5EF4-FFF2-40B4-BE49-F238E27FC236}">
-                <ma14:creationId id="{1A8B18F2-753B-4108-BAFD-3D0C19CB8764}"/>
+                <a16:creationId xmlns:a16="http://schemas.microsoft.com/office/drawing/2014/main" id="{1A8B18F2-753B-4108-BAFD-3D0C19CB8764}"/>
               </a:ext>
             </a:extLst>
           </p:cNvPr>
@@ -2522,7 +2502,7 @@
           <p:cNvPr id="37" name="brief-item-2">
             <a:extLst>
               <a:ext uri="{FF2B5EF4-FFF2-40B4-BE49-F238E27FC236}">
-                <ma14:creationId id="{89419B57-F613-419B-9936-5F5E475498C6}"/>
+                <a16:creationId xmlns:a16="http://schemas.microsoft.com/office/drawing/2014/main" id="{89419B57-F613-419B-9936-5F5E475498C6}"/>
               </a:ext>
             </a:extLst>
           </p:cNvPr>
@@ -2572,7 +2552,7 @@
           <p:cNvPr id="38" name="brief-item-3">
             <a:extLst>
               <a:ext uri="{FF2B5EF4-FFF2-40B4-BE49-F238E27FC236}">
-                <ma14:creationId id="{541613F4-D73D-49EA-905A-C937A564B748}"/>
+                <a16:creationId xmlns:a16="http://schemas.microsoft.com/office/drawing/2014/main" id="{541613F4-D73D-49EA-905A-C937A564B748}"/>
               </a:ext>
             </a:extLst>
           </p:cNvPr>
@@ -2622,7 +2602,7 @@
           <p:cNvPr id="39" name="brief-item-4">
             <a:extLst>
               <a:ext uri="{FF2B5EF4-FFF2-40B4-BE49-F238E27FC236}">
-                <ma14:creationId id="{F92F00F2-B48C-4C4A-9AF1-2D58398CB386}"/>
+                <a16:creationId xmlns:a16="http://schemas.microsoft.com/office/drawing/2014/main" id="{F92F00F2-B48C-4C4A-9AF1-2D58398CB386}"/>
               </a:ext>
             </a:extLst>
           </p:cNvPr>
@@ -2672,7 +2652,7 @@
           <p:cNvPr id="40" name="brief-item-5">
             <a:extLst>
               <a:ext uri="{FF2B5EF4-FFF2-40B4-BE49-F238E27FC236}">
-                <ma14:creationId id="{65207A74-7247-4067-92EC-FF1656AD8C19}"/>
+                <a16:creationId xmlns:a16="http://schemas.microsoft.com/office/drawing/2014/main" id="{65207A74-7247-4067-92EC-FF1656AD8C19}"/>
               </a:ext>
             </a:extLst>
           </p:cNvPr>
@@ -2722,7 +2702,7 @@
           <p:cNvPr id="41" name="footer-source">
             <a:extLst>
               <a:ext uri="{FF2B5EF4-FFF2-40B4-BE49-F238E27FC236}">
-                <ma14:creationId id="{27DEA7E4-E67E-44DF-918F-E24922A2808E}"/>
+                <a16:creationId xmlns:a16="http://schemas.microsoft.com/office/drawing/2014/main" id="{27DEA7E4-E67E-44DF-918F-E24922A2808E}"/>
               </a:ext>
             </a:extLst>
           </p:cNvPr>
@@ -2772,7 +2752,7 @@
           <p:cNvPr id="42" name="footer-team">
             <a:extLst>
               <a:ext uri="{FF2B5EF4-FFF2-40B4-BE49-F238E27FC236}">
-                <ma14:creationId id="{18262459-389B-4187-ACB9-6D50A32D75BF}"/>
+                <a16:creationId xmlns:a16="http://schemas.microsoft.com/office/drawing/2014/main" id="{18262459-389B-4187-ACB9-6D50A32D75BF}"/>
               </a:ext>
             </a:extLst>
           </p:cNvPr>
@@ -2817,10 +2797,46 @@
           </a:p>
         </p:txBody>
       </p:sp>
+      <p:pic>
+        <p:nvPicPr>
+          <p:cNvPr id="18" name="Picture 17">
+            <a:extLst>
+              <a:ext uri="{FF2B5EF4-FFF2-40B4-BE49-F238E27FC236}">
+                <a16:creationId xmlns:a16="http://schemas.microsoft.com/office/drawing/2014/main" id="{4DC8CC8D-7A04-E0F6-2D3F-BEBB250715A7}"/>
+              </a:ext>
+            </a:extLst>
+          </p:cNvPr>
+          <p:cNvPicPr>
+            <a:picLocks noChangeAspect="1"/>
+          </p:cNvPicPr>
+          <p:nvPr/>
+        </p:nvPicPr>
+        <p:blipFill>
+          <a:blip r:embed="rId4">
+            <a:extLst>
+              <a:ext uri="{28A0092B-C50C-407E-A947-70E740481C1C}">
+                <a14:useLocalDpi xmlns:a14="http://schemas.microsoft.com/office/drawing/2010/main" val="0"/>
+              </a:ext>
+            </a:extLst>
+          </a:blip>
+          <a:stretch>
+            <a:fillRect/>
+          </a:stretch>
+        </p:blipFill>
+        <p:spPr>
+          <a:xfrm>
+            <a:off x="5349405" y="1819275"/>
+            <a:ext cx="5969940" cy="4810125"/>
+          </a:xfrm>
+          <a:prstGeom prst="rect">
+            <a:avLst/>
+          </a:prstGeom>
+        </p:spPr>
+      </p:pic>
     </p:spTree>
     <p:extLst>
       <p:ext uri="{BB962C8B-B14F-4D97-AF65-F5344CB8AC3E}">
-        <p14:creationId val="1463500918"/>
+        <p14:creationId xmlns:p14="http://schemas.microsoft.com/office/powerpoint/2010/main" val="1463500918"/>
       </p:ext>
     </p:extLst>
   </p:cSld>
